--- a/outputs/LTI_Learning_Experience_Capital_Learning.pptx
+++ b/outputs/LTI_Learning_Experience_Capital_Learning.pptx
@@ -24745,21 +24745,147 @@
       </p:sp>
       <p:sp>
         <p:nvSpPr>
-          <p:cNvPr id="6" name="Rounded Rectangle 5"/>
+          <p:cNvPr id="6" name="Rectangle 5"/>
           <p:cNvSpPr/>
           <p:nvPr/>
         </p:nvSpPr>
         <p:spPr>
           <a:xfrm>
-            <a:off x="1737360" y="2560320"/>
-            <a:ext cx="2651760" cy="1371600"/>
+            <a:off x="10744200" y="-1188720"/>
+            <a:ext cx="2286000" cy="2286000"/>
+          </a:xfrm>
+          <a:prstGeom prst="rect">
+            <a:avLst/>
+          </a:prstGeom>
+          <a:noFill/>
+          <a:ln w="31750">
+            <a:solidFill>
+              <a:srgbClr val="E6ECEE"/>
+            </a:solidFill>
+          </a:ln>
+          <a:effectLst/>
+        </p:spPr>
+        <p:style>
+          <a:lnRef idx="1">
+            <a:schemeClr val="accent1"/>
+          </a:lnRef>
+          <a:fillRef idx="3">
+            <a:schemeClr val="accent1"/>
+          </a:fillRef>
+          <a:effectRef idx="2">
+            <a:schemeClr val="accent1"/>
+          </a:effectRef>
+          <a:fontRef idx="minor">
+            <a:schemeClr val="lt1"/>
+          </a:fontRef>
+        </p:style>
+        <p:txBody>
+          <a:bodyPr rtlCol="0" anchor="ctr"/>
+          <a:lstStyle/>
+          <a:p>
+            <a:pPr algn="ctr"/>
+          </a:p>
+        </p:txBody>
+      </p:sp>
+      <p:sp>
+        <p:nvSpPr>
+          <p:cNvPr id="7" name="Rectangle 6"/>
+          <p:cNvSpPr/>
+          <p:nvPr/>
+        </p:nvSpPr>
+        <p:spPr>
+          <a:xfrm>
+            <a:off x="11384280" y="-548640"/>
+            <a:ext cx="2103120" cy="2103120"/>
+          </a:xfrm>
+          <a:prstGeom prst="rect">
+            <a:avLst/>
+          </a:prstGeom>
+          <a:noFill/>
+          <a:ln w="31750">
+            <a:solidFill>
+              <a:srgbClr val="D0EAE9"/>
+            </a:solidFill>
+          </a:ln>
+          <a:effectLst/>
+        </p:spPr>
+        <p:style>
+          <a:lnRef idx="1">
+            <a:schemeClr val="accent1"/>
+          </a:lnRef>
+          <a:fillRef idx="3">
+            <a:schemeClr val="accent1"/>
+          </a:fillRef>
+          <a:effectRef idx="2">
+            <a:schemeClr val="accent1"/>
+          </a:effectRef>
+          <a:fontRef idx="minor">
+            <a:schemeClr val="lt1"/>
+          </a:fontRef>
+        </p:style>
+        <p:txBody>
+          <a:bodyPr rtlCol="0" anchor="ctr"/>
+          <a:lstStyle/>
+          <a:p>
+            <a:pPr algn="ctr"/>
+          </a:p>
+        </p:txBody>
+      </p:sp>
+      <p:cxnSp>
+        <p:nvCxnSpPr>
+          <p:cNvPr id="8" name="Connector 7"/>
+          <p:cNvCxnSpPr/>
+          <p:nvPr/>
+        </p:nvCxnSpPr>
+        <p:spPr>
+          <a:xfrm>
+            <a:off x="1188720" y="3223260"/>
+            <a:ext cx="9829800" cy="0"/>
+          </a:xfrm>
+          <a:prstGeom prst="line">
+            <a:avLst/>
+          </a:prstGeom>
+          <a:ln w="31750">
+            <a:solidFill>
+              <a:srgbClr val="E6ECEE"/>
+            </a:solidFill>
+          </a:ln>
+          <a:effectLst/>
+        </p:spPr>
+        <p:style>
+          <a:lnRef idx="2">
+            <a:schemeClr val="accent1"/>
+          </a:lnRef>
+          <a:fillRef idx="0">
+            <a:schemeClr val="accent1"/>
+          </a:fillRef>
+          <a:effectRef idx="1">
+            <a:schemeClr val="accent1"/>
+          </a:effectRef>
+          <a:fontRef idx="minor">
+            <a:schemeClr val="tx1"/>
+          </a:fontRef>
+        </p:style>
+      </p:cxnSp>
+      <p:sp>
+        <p:nvSpPr>
+          <p:cNvPr id="9" name="Rounded Rectangle 8"/>
+          <p:cNvSpPr/>
+          <p:nvPr/>
+        </p:nvSpPr>
+        <p:spPr>
+          <a:xfrm>
+            <a:off x="1737360" y="2240280"/>
+            <a:ext cx="2651760" cy="1965960"/>
           </a:xfrm>
           <a:prstGeom prst="roundRect">
             <a:avLst>
               <a:gd name="adj" fmla="val 8000"/>
             </a:avLst>
           </a:prstGeom>
-          <a:noFill/>
+          <a:solidFill>
+            <a:srgbClr val="FFFFFF"/>
+          </a:solidFill>
           <a:ln w="19050">
             <a:solidFill>
               <a:srgbClr val="8FADB2"/>
@@ -24792,14 +24918,53 @@
       </p:sp>
       <p:sp>
         <p:nvSpPr>
-          <p:cNvPr id="7" name="TextBox 6"/>
+          <p:cNvPr id="10" name="TextBox 9"/>
           <p:cNvSpPr txBox="1"/>
           <p:nvPr/>
         </p:nvSpPr>
         <p:spPr>
           <a:xfrm>
-            <a:off x="1737360" y="2880360"/>
-            <a:ext cx="2651760" cy="457200"/>
+            <a:off x="1737360" y="2496312"/>
+            <a:ext cx="2651760" cy="640080"/>
+          </a:xfrm>
+          <a:prstGeom prst="rect">
+            <a:avLst/>
+          </a:prstGeom>
+          <a:noFill/>
+        </p:spPr>
+        <p:txBody>
+          <a:bodyPr wrap="square" lIns="0" rIns="0" tIns="0" bIns="0">
+            <a:spAutoFit/>
+          </a:bodyPr>
+          <a:lstStyle/>
+          <a:p>
+            <a:pPr algn="ctr">
+              <a:lnSpc>
+                <a:spcPct val="100000"/>
+              </a:lnSpc>
+            </a:pPr>
+            <a:r>
+              <a:rPr sz="4000" b="1" i="0">
+                <a:solidFill>
+                  <a:srgbClr val="E6ECEE"/>
+                </a:solidFill>
+                <a:latin typeface="Arial"/>
+              </a:rPr>
+              <a:t>?</a:t>
+            </a:r>
+          </a:p>
+        </p:txBody>
+      </p:sp>
+      <p:sp>
+        <p:nvSpPr>
+          <p:cNvPr id="11" name="TextBox 10"/>
+          <p:cNvSpPr txBox="1"/>
+          <p:nvPr/>
+        </p:nvSpPr>
+        <p:spPr>
+          <a:xfrm>
+            <a:off x="1737360" y="3200400"/>
+            <a:ext cx="2651760" cy="365760"/>
           </a:xfrm>
           <a:prstGeom prst="rect">
             <a:avLst/>
@@ -24831,13 +24996,13 @@
       </p:sp>
       <p:sp>
         <p:nvSpPr>
-          <p:cNvPr id="8" name="TextBox 7"/>
+          <p:cNvPr id="12" name="TextBox 11"/>
           <p:cNvSpPr txBox="1"/>
           <p:nvPr/>
         </p:nvSpPr>
         <p:spPr>
           <a:xfrm>
-            <a:off x="1737360" y="3291840"/>
+            <a:off x="1737360" y="3611880"/>
             <a:ext cx="2651760" cy="365760"/>
           </a:xfrm>
           <a:prstGeom prst="rect">
@@ -24870,14 +25035,180 @@
       </p:sp>
       <p:sp>
         <p:nvSpPr>
-          <p:cNvPr id="9" name="Rounded Rectangle 8"/>
+          <p:cNvPr id="13" name="Rounded Rectangle 12"/>
           <p:cNvSpPr/>
           <p:nvPr/>
         </p:nvSpPr>
         <p:spPr>
           <a:xfrm>
-            <a:off x="4709160" y="2331720"/>
-            <a:ext cx="2788920" cy="1828800"/>
+            <a:off x="7818120" y="2240280"/>
+            <a:ext cx="2651760" cy="1965960"/>
+          </a:xfrm>
+          <a:prstGeom prst="roundRect">
+            <a:avLst>
+              <a:gd name="adj" fmla="val 8000"/>
+            </a:avLst>
+          </a:prstGeom>
+          <a:solidFill>
+            <a:srgbClr val="FFFFFF"/>
+          </a:solidFill>
+          <a:ln w="19050">
+            <a:solidFill>
+              <a:srgbClr val="8FADB2"/>
+            </a:solidFill>
+            <a:prstDash val="dash"/>
+          </a:ln>
+          <a:effectLst/>
+        </p:spPr>
+        <p:style>
+          <a:lnRef idx="1">
+            <a:schemeClr val="accent1"/>
+          </a:lnRef>
+          <a:fillRef idx="3">
+            <a:schemeClr val="accent1"/>
+          </a:fillRef>
+          <a:effectRef idx="2">
+            <a:schemeClr val="accent1"/>
+          </a:effectRef>
+          <a:fontRef idx="minor">
+            <a:schemeClr val="lt1"/>
+          </a:fontRef>
+        </p:style>
+        <p:txBody>
+          <a:bodyPr rtlCol="0" anchor="ctr"/>
+          <a:lstStyle/>
+          <a:p>
+            <a:pPr algn="ctr"/>
+          </a:p>
+        </p:txBody>
+      </p:sp>
+      <p:sp>
+        <p:nvSpPr>
+          <p:cNvPr id="14" name="TextBox 13"/>
+          <p:cNvSpPr txBox="1"/>
+          <p:nvPr/>
+        </p:nvSpPr>
+        <p:spPr>
+          <a:xfrm>
+            <a:off x="7818120" y="2496312"/>
+            <a:ext cx="2651760" cy="640080"/>
+          </a:xfrm>
+          <a:prstGeom prst="rect">
+            <a:avLst/>
+          </a:prstGeom>
+          <a:noFill/>
+        </p:spPr>
+        <p:txBody>
+          <a:bodyPr wrap="square" lIns="0" rIns="0" tIns="0" bIns="0">
+            <a:spAutoFit/>
+          </a:bodyPr>
+          <a:lstStyle/>
+          <a:p>
+            <a:pPr algn="ctr">
+              <a:lnSpc>
+                <a:spcPct val="100000"/>
+              </a:lnSpc>
+            </a:pPr>
+            <a:r>
+              <a:rPr sz="4000" b="1" i="0">
+                <a:solidFill>
+                  <a:srgbClr val="E6ECEE"/>
+                </a:solidFill>
+                <a:latin typeface="Arial"/>
+              </a:rPr>
+              <a:t>?</a:t>
+            </a:r>
+          </a:p>
+        </p:txBody>
+      </p:sp>
+      <p:sp>
+        <p:nvSpPr>
+          <p:cNvPr id="15" name="TextBox 14"/>
+          <p:cNvSpPr txBox="1"/>
+          <p:nvPr/>
+        </p:nvSpPr>
+        <p:spPr>
+          <a:xfrm>
+            <a:off x="7818120" y="3200400"/>
+            <a:ext cx="2651760" cy="365760"/>
+          </a:xfrm>
+          <a:prstGeom prst="rect">
+            <a:avLst/>
+          </a:prstGeom>
+          <a:noFill/>
+        </p:spPr>
+        <p:txBody>
+          <a:bodyPr wrap="square" lIns="0" rIns="0" tIns="0" bIns="0">
+            <a:spAutoFit/>
+          </a:bodyPr>
+          <a:lstStyle/>
+          <a:p>
+            <a:pPr algn="ctr">
+              <a:lnSpc>
+                <a:spcPct val="100000"/>
+              </a:lnSpc>
+            </a:pPr>
+            <a:r>
+              <a:rPr sz="1500" b="1" i="0">
+                <a:solidFill>
+                  <a:srgbClr val="8FADB2"/>
+                </a:solidFill>
+                <a:latin typeface="Arial"/>
+              </a:rPr>
+              <a:t>AFTER</a:t>
+            </a:r>
+          </a:p>
+        </p:txBody>
+      </p:sp>
+      <p:sp>
+        <p:nvSpPr>
+          <p:cNvPr id="16" name="TextBox 15"/>
+          <p:cNvSpPr txBox="1"/>
+          <p:nvPr/>
+        </p:nvSpPr>
+        <p:spPr>
+          <a:xfrm>
+            <a:off x="7818120" y="3611880"/>
+            <a:ext cx="2651760" cy="365760"/>
+          </a:xfrm>
+          <a:prstGeom prst="rect">
+            <a:avLst/>
+          </a:prstGeom>
+          <a:noFill/>
+        </p:spPr>
+        <p:txBody>
+          <a:bodyPr wrap="square" lIns="0" rIns="0" tIns="0" bIns="0">
+            <a:spAutoFit/>
+          </a:bodyPr>
+          <a:lstStyle/>
+          <a:p>
+            <a:pPr algn="ctr">
+              <a:lnSpc>
+                <a:spcPct val="100000"/>
+              </a:lnSpc>
+            </a:pPr>
+            <a:r>
+              <a:rPr sz="1300" b="0" i="1">
+                <a:solidFill>
+                  <a:srgbClr val="8FADB2"/>
+                </a:solidFill>
+                <a:latin typeface="Arial"/>
+              </a:rPr>
+              <a:t>nothing</a:t>
+            </a:r>
+          </a:p>
+        </p:txBody>
+      </p:sp>
+      <p:sp>
+        <p:nvSpPr>
+          <p:cNvPr id="17" name="Rounded Rectangle 16"/>
+          <p:cNvSpPr/>
+          <p:nvPr/>
+        </p:nvSpPr>
+        <p:spPr>
+          <a:xfrm>
+            <a:off x="4709160" y="2011680"/>
+            <a:ext cx="2788920" cy="2423160"/>
           </a:xfrm>
           <a:prstGeom prst="roundRect">
             <a:avLst>
@@ -24916,13 +25247,57 @@
       </p:sp>
       <p:sp>
         <p:nvSpPr>
-          <p:cNvPr id="10" name="TextBox 9"/>
+          <p:cNvPr id="18" name="Rectangle 17"/>
+          <p:cNvSpPr/>
+          <p:nvPr/>
+        </p:nvSpPr>
+        <p:spPr>
+          <a:xfrm>
+            <a:off x="4709160" y="2011680"/>
+            <a:ext cx="2788920" cy="128016"/>
+          </a:xfrm>
+          <a:prstGeom prst="rect">
+            <a:avLst/>
+          </a:prstGeom>
+          <a:solidFill>
+            <a:srgbClr val="008074"/>
+          </a:solidFill>
+          <a:ln>
+            <a:noFill/>
+          </a:ln>
+          <a:effectLst/>
+        </p:spPr>
+        <p:style>
+          <a:lnRef idx="1">
+            <a:schemeClr val="accent1"/>
+          </a:lnRef>
+          <a:fillRef idx="3">
+            <a:schemeClr val="accent1"/>
+          </a:fillRef>
+          <a:effectRef idx="2">
+            <a:schemeClr val="accent1"/>
+          </a:effectRef>
+          <a:fontRef idx="minor">
+            <a:schemeClr val="lt1"/>
+          </a:fontRef>
+        </p:style>
+        <p:txBody>
+          <a:bodyPr rtlCol="0" anchor="ctr"/>
+          <a:lstStyle/>
+          <a:p>
+            <a:pPr algn="ctr"/>
+          </a:p>
+        </p:txBody>
+      </p:sp>
+      <p:sp>
+        <p:nvSpPr>
+          <p:cNvPr id="19" name="TextBox 18"/>
           <p:cNvSpPr txBox="1"/>
           <p:nvPr/>
         </p:nvSpPr>
         <p:spPr>
           <a:xfrm>
-            <a:off x="4709160" y="2697480"/>
+            <a:off x="4709160" y="2624328"/>
             <a:ext cx="2788920" cy="457200"/>
           </a:xfrm>
           <a:prstGeom prst="rect">
@@ -24942,7 +25317,7 @@
               </a:lnSpc>
             </a:pPr>
             <a:r>
-              <a:rPr sz="1600" b="1" i="0">
+              <a:rPr sz="1700" b="1" i="0">
                 <a:solidFill>
                   <a:srgbClr val="FFFFFF"/>
                 </a:solidFill>
@@ -24955,13 +25330,13 @@
       </p:sp>
       <p:sp>
         <p:nvSpPr>
-          <p:cNvPr id="11" name="TextBox 10"/>
+          <p:cNvPr id="20" name="TextBox 19"/>
           <p:cNvSpPr txBox="1"/>
           <p:nvPr/>
         </p:nvSpPr>
         <p:spPr>
           <a:xfrm>
-            <a:off x="4709160" y="3035808"/>
+            <a:off x="4709160" y="2990088"/>
             <a:ext cx="2788920" cy="457200"/>
           </a:xfrm>
           <a:prstGeom prst="rect">
@@ -24981,7 +25356,7 @@
               </a:lnSpc>
             </a:pPr>
             <a:r>
-              <a:rPr sz="1600" b="1" i="0">
+              <a:rPr sz="1700" b="1" i="0">
                 <a:solidFill>
                   <a:srgbClr val="FFFFFF"/>
                 </a:solidFill>
@@ -24992,15 +25367,51 @@
           </a:p>
         </p:txBody>
       </p:sp>
-      <p:sp>
-        <p:nvSpPr>
-          <p:cNvPr id="12" name="TextBox 11"/>
+      <p:cxnSp>
+        <p:nvCxnSpPr>
+          <p:cNvPr id="21" name="Connector 20"/>
+          <p:cNvCxnSpPr/>
+          <p:nvPr/>
+        </p:nvCxnSpPr>
+        <p:spPr>
+          <a:xfrm>
+            <a:off x="5623560" y="3538728"/>
+            <a:ext cx="365760" cy="0"/>
+          </a:xfrm>
+          <a:prstGeom prst="line">
+            <a:avLst/>
+          </a:prstGeom>
+          <a:ln w="31750">
+            <a:solidFill>
+              <a:srgbClr val="008074"/>
+            </a:solidFill>
+          </a:ln>
+          <a:effectLst/>
+        </p:spPr>
+        <p:style>
+          <a:lnRef idx="2">
+            <a:schemeClr val="accent1"/>
+          </a:lnRef>
+          <a:fillRef idx="0">
+            <a:schemeClr val="accent1"/>
+          </a:fillRef>
+          <a:effectRef idx="1">
+            <a:schemeClr val="accent1"/>
+          </a:effectRef>
+          <a:fontRef idx="minor">
+            <a:schemeClr val="tx1"/>
+          </a:fontRef>
+        </p:style>
+      </p:cxnSp>
+      <p:sp>
+        <p:nvSpPr>
+          <p:cNvPr id="22" name="TextBox 21"/>
           <p:cNvSpPr txBox="1"/>
           <p:nvPr/>
         </p:nvSpPr>
         <p:spPr>
           <a:xfrm>
-            <a:off x="4709160" y="3547872"/>
+            <a:off x="4709160" y="3685032"/>
             <a:ext cx="2788920" cy="365760"/>
           </a:xfrm>
           <a:prstGeom prst="rect">
@@ -25027,131 +25438,6 @@
                 <a:latin typeface="Arial"/>
               </a:rPr>
               <a:t>strong but self-contained</a:t>
-            </a:r>
-          </a:p>
-        </p:txBody>
-      </p:sp>
-      <p:sp>
-        <p:nvSpPr>
-          <p:cNvPr id="13" name="Rounded Rectangle 12"/>
-          <p:cNvSpPr/>
-          <p:nvPr/>
-        </p:nvSpPr>
-        <p:spPr>
-          <a:xfrm>
-            <a:off x="7818120" y="2560320"/>
-            <a:ext cx="2651760" cy="1371600"/>
-          </a:xfrm>
-          <a:prstGeom prst="roundRect">
-            <a:avLst>
-              <a:gd name="adj" fmla="val 8000"/>
-            </a:avLst>
-          </a:prstGeom>
-          <a:noFill/>
-          <a:ln w="19050">
-            <a:solidFill>
-              <a:srgbClr val="8FADB2"/>
-            </a:solidFill>
-            <a:prstDash val="dash"/>
-          </a:ln>
-          <a:effectLst/>
-        </p:spPr>
-        <p:style>
-          <a:lnRef idx="1">
-            <a:schemeClr val="accent1"/>
-          </a:lnRef>
-          <a:fillRef idx="3">
-            <a:schemeClr val="accent1"/>
-          </a:fillRef>
-          <a:effectRef idx="2">
-            <a:schemeClr val="accent1"/>
-          </a:effectRef>
-          <a:fontRef idx="minor">
-            <a:schemeClr val="lt1"/>
-          </a:fontRef>
-        </p:style>
-        <p:txBody>
-          <a:bodyPr rtlCol="0" anchor="ctr"/>
-          <a:lstStyle/>
-          <a:p>
-            <a:pPr algn="ctr"/>
-          </a:p>
-        </p:txBody>
-      </p:sp>
-      <p:sp>
-        <p:nvSpPr>
-          <p:cNvPr id="14" name="TextBox 13"/>
-          <p:cNvSpPr txBox="1"/>
-          <p:nvPr/>
-        </p:nvSpPr>
-        <p:spPr>
-          <a:xfrm>
-            <a:off x="7818120" y="2880360"/>
-            <a:ext cx="2651760" cy="457200"/>
-          </a:xfrm>
-          <a:prstGeom prst="rect">
-            <a:avLst/>
-          </a:prstGeom>
-          <a:noFill/>
-        </p:spPr>
-        <p:txBody>
-          <a:bodyPr wrap="square" lIns="0" rIns="0" tIns="0" bIns="0">
-            <a:spAutoFit/>
-          </a:bodyPr>
-          <a:lstStyle/>
-          <a:p>
-            <a:pPr algn="ctr">
-              <a:lnSpc>
-                <a:spcPct val="100000"/>
-              </a:lnSpc>
-            </a:pPr>
-            <a:r>
-              <a:rPr sz="1500" b="1" i="0">
-                <a:solidFill>
-                  <a:srgbClr val="8FADB2"/>
-                </a:solidFill>
-                <a:latin typeface="Arial"/>
-              </a:rPr>
-              <a:t>AFTER</a:t>
-            </a:r>
-          </a:p>
-        </p:txBody>
-      </p:sp>
-      <p:sp>
-        <p:nvSpPr>
-          <p:cNvPr id="15" name="TextBox 14"/>
-          <p:cNvSpPr txBox="1"/>
-          <p:nvPr/>
-        </p:nvSpPr>
-        <p:spPr>
-          <a:xfrm>
-            <a:off x="7818120" y="3291840"/>
-            <a:ext cx="2651760" cy="365760"/>
-          </a:xfrm>
-          <a:prstGeom prst="rect">
-            <a:avLst/>
-          </a:prstGeom>
-          <a:noFill/>
-        </p:spPr>
-        <p:txBody>
-          <a:bodyPr wrap="square" lIns="0" rIns="0" tIns="0" bIns="0">
-            <a:spAutoFit/>
-          </a:bodyPr>
-          <a:lstStyle/>
-          <a:p>
-            <a:pPr algn="ctr">
-              <a:lnSpc>
-                <a:spcPct val="100000"/>
-              </a:lnSpc>
-            </a:pPr>
-            <a:r>
-              <a:rPr sz="1300" b="0" i="1">
-                <a:solidFill>
-                  <a:srgbClr val="8FADB2"/>
-                </a:solidFill>
-                <a:latin typeface="Arial"/>
-              </a:rPr>
-              <a:t>nothing</a:t>
             </a:r>
           </a:p>
         </p:txBody>
@@ -25218,22 +25504,108 @@
       </p:sp>
       <p:sp>
         <p:nvSpPr>
-          <p:cNvPr id="6" name="Rounded Rectangle 5"/>
+          <p:cNvPr id="6" name="Rectangle 5"/>
           <p:cNvSpPr/>
           <p:nvPr/>
         </p:nvSpPr>
         <p:spPr>
           <a:xfrm>
-            <a:off x="1874519" y="1965960"/>
-            <a:ext cx="8458200" cy="2331720"/>
-          </a:xfrm>
-          <a:prstGeom prst="roundRect">
-            <a:avLst>
-              <a:gd name="adj" fmla="val 8000"/>
-            </a:avLst>
+            <a:off x="10744200" y="-1188720"/>
+            <a:ext cx="2286000" cy="2286000"/>
+          </a:xfrm>
+          <a:prstGeom prst="rect">
+            <a:avLst/>
+          </a:prstGeom>
+          <a:noFill/>
+          <a:ln w="31750">
+            <a:solidFill>
+              <a:srgbClr val="E6ECEE"/>
+            </a:solidFill>
+          </a:ln>
+          <a:effectLst/>
+        </p:spPr>
+        <p:style>
+          <a:lnRef idx="1">
+            <a:schemeClr val="accent1"/>
+          </a:lnRef>
+          <a:fillRef idx="3">
+            <a:schemeClr val="accent1"/>
+          </a:fillRef>
+          <a:effectRef idx="2">
+            <a:schemeClr val="accent1"/>
+          </a:effectRef>
+          <a:fontRef idx="minor">
+            <a:schemeClr val="lt1"/>
+          </a:fontRef>
+        </p:style>
+        <p:txBody>
+          <a:bodyPr rtlCol="0" anchor="ctr"/>
+          <a:lstStyle/>
+          <a:p>
+            <a:pPr algn="ctr"/>
+          </a:p>
+        </p:txBody>
+      </p:sp>
+      <p:sp>
+        <p:nvSpPr>
+          <p:cNvPr id="7" name="Rectangle 6"/>
+          <p:cNvSpPr/>
+          <p:nvPr/>
+        </p:nvSpPr>
+        <p:spPr>
+          <a:xfrm>
+            <a:off x="11384280" y="-548640"/>
+            <a:ext cx="2103120" cy="2103120"/>
+          </a:xfrm>
+          <a:prstGeom prst="rect">
+            <a:avLst/>
+          </a:prstGeom>
+          <a:noFill/>
+          <a:ln w="31750">
+            <a:solidFill>
+              <a:srgbClr val="D0EAE9"/>
+            </a:solidFill>
+          </a:ln>
+          <a:effectLst/>
+        </p:spPr>
+        <p:style>
+          <a:lnRef idx="1">
+            <a:schemeClr val="accent1"/>
+          </a:lnRef>
+          <a:fillRef idx="3">
+            <a:schemeClr val="accent1"/>
+          </a:fillRef>
+          <a:effectRef idx="2">
+            <a:schemeClr val="accent1"/>
+          </a:effectRef>
+          <a:fontRef idx="minor">
+            <a:schemeClr val="lt1"/>
+          </a:fontRef>
+        </p:style>
+        <p:txBody>
+          <a:bodyPr rtlCol="0" anchor="ctr"/>
+          <a:lstStyle/>
+          <a:p>
+            <a:pPr algn="ctr"/>
+          </a:p>
+        </p:txBody>
+      </p:sp>
+      <p:sp>
+        <p:nvSpPr>
+          <p:cNvPr id="8" name="Pentagon 7"/>
+          <p:cNvSpPr/>
+          <p:nvPr/>
+        </p:nvSpPr>
+        <p:spPr>
+          <a:xfrm>
+            <a:off x="1051560" y="2697480"/>
+            <a:ext cx="3429000" cy="1051560"/>
+          </a:xfrm>
+          <a:prstGeom prst="homePlate">
+            <a:avLst/>
           </a:prstGeom>
           <a:solidFill>
-            <a:srgbClr val="E6ECEE"/>
+            <a:srgbClr val="D0EAE9"/>
           </a:solidFill>
           <a:ln>
             <a:noFill/>
@@ -25264,62 +25636,14 @@
       </p:sp>
       <p:sp>
         <p:nvSpPr>
-          <p:cNvPr id="7" name="Rounded Rectangle 6"/>
-          <p:cNvSpPr/>
-          <p:nvPr/>
-        </p:nvSpPr>
-        <p:spPr>
-          <a:xfrm>
-            <a:off x="2423160" y="2743200"/>
-            <a:ext cx="2103120" cy="731520"/>
-          </a:xfrm>
-          <a:prstGeom prst="roundRect">
-            <a:avLst>
-              <a:gd name="adj" fmla="val 8000"/>
-            </a:avLst>
-          </a:prstGeom>
-          <a:solidFill>
-            <a:srgbClr val="FFFFFF"/>
-          </a:solidFill>
-          <a:ln w="19050">
-            <a:solidFill>
-              <a:srgbClr val="008074"/>
-            </a:solidFill>
-          </a:ln>
-          <a:effectLst/>
-        </p:spPr>
-        <p:style>
-          <a:lnRef idx="1">
-            <a:schemeClr val="accent1"/>
-          </a:lnRef>
-          <a:fillRef idx="3">
-            <a:schemeClr val="accent1"/>
-          </a:fillRef>
-          <a:effectRef idx="2">
-            <a:schemeClr val="accent1"/>
-          </a:effectRef>
-          <a:fontRef idx="minor">
-            <a:schemeClr val="lt1"/>
-          </a:fontRef>
-        </p:style>
-        <p:txBody>
-          <a:bodyPr rtlCol="0" anchor="ctr"/>
-          <a:lstStyle/>
-          <a:p>
-            <a:pPr algn="ctr"/>
-          </a:p>
-        </p:txBody>
-      </p:sp>
-      <p:sp>
-        <p:nvSpPr>
-          <p:cNvPr id="8" name="TextBox 7"/>
+          <p:cNvPr id="9" name="TextBox 8"/>
           <p:cNvSpPr txBox="1"/>
           <p:nvPr/>
         </p:nvSpPr>
         <p:spPr>
           <a:xfrm>
-            <a:off x="2423160" y="2962656"/>
-            <a:ext cx="2103120" cy="365760"/>
+            <a:off x="1161288" y="3081528"/>
+            <a:ext cx="3017520" cy="365760"/>
           </a:xfrm>
           <a:prstGeom prst="rect">
             <a:avLst/>
@@ -25338,7 +25662,7 @@
               </a:lnSpc>
             </a:pPr>
             <a:r>
-              <a:rPr sz="1250" b="1" i="0">
+              <a:rPr sz="1450" b="1" i="0">
                 <a:solidFill>
                   <a:srgbClr val="008074"/>
                 </a:solidFill>
@@ -25351,16 +25675,16 @@
       </p:sp>
       <p:sp>
         <p:nvSpPr>
-          <p:cNvPr id="9" name="Right Arrow 8"/>
+          <p:cNvPr id="10" name="Chevron 9"/>
           <p:cNvSpPr/>
           <p:nvPr/>
         </p:nvSpPr>
         <p:spPr>
           <a:xfrm>
-            <a:off x="4654295" y="2962656"/>
-            <a:ext cx="347472" cy="292608"/>
-          </a:xfrm>
-          <a:prstGeom prst="rightArrow">
+            <a:off x="4187952" y="2697480"/>
+            <a:ext cx="3429000" cy="1051560"/>
+          </a:xfrm>
+          <a:prstGeom prst="chevron">
             <a:avLst/>
           </a:prstGeom>
           <a:solidFill>
@@ -25395,60 +25719,14 @@
       </p:sp>
       <p:sp>
         <p:nvSpPr>
-          <p:cNvPr id="10" name="Rounded Rectangle 9"/>
-          <p:cNvSpPr/>
-          <p:nvPr/>
-        </p:nvSpPr>
-        <p:spPr>
-          <a:xfrm>
-            <a:off x="5120640" y="2743200"/>
-            <a:ext cx="2103120" cy="731520"/>
-          </a:xfrm>
-          <a:prstGeom prst="roundRect">
-            <a:avLst>
-              <a:gd name="adj" fmla="val 8000"/>
-            </a:avLst>
-          </a:prstGeom>
-          <a:solidFill>
-            <a:srgbClr val="008074"/>
-          </a:solidFill>
-          <a:ln>
-            <a:noFill/>
-          </a:ln>
-          <a:effectLst/>
-        </p:spPr>
-        <p:style>
-          <a:lnRef idx="1">
-            <a:schemeClr val="accent1"/>
-          </a:lnRef>
-          <a:fillRef idx="3">
-            <a:schemeClr val="accent1"/>
-          </a:fillRef>
-          <a:effectRef idx="2">
-            <a:schemeClr val="accent1"/>
-          </a:effectRef>
-          <a:fontRef idx="minor">
-            <a:schemeClr val="lt1"/>
-          </a:fontRef>
-        </p:style>
-        <p:txBody>
-          <a:bodyPr rtlCol="0" anchor="ctr"/>
-          <a:lstStyle/>
-          <a:p>
-            <a:pPr algn="ctr"/>
-          </a:p>
-        </p:txBody>
-      </p:sp>
-      <p:sp>
-        <p:nvSpPr>
           <p:cNvPr id="11" name="TextBox 10"/>
           <p:cNvSpPr txBox="1"/>
           <p:nvPr/>
         </p:nvSpPr>
         <p:spPr>
           <a:xfrm>
-            <a:off x="5120640" y="2962656"/>
-            <a:ext cx="2103120" cy="365760"/>
+            <a:off x="4462272" y="3081528"/>
+            <a:ext cx="3017520" cy="365760"/>
           </a:xfrm>
           <a:prstGeom prst="rect">
             <a:avLst/>
@@ -25467,7 +25745,7 @@
               </a:lnSpc>
             </a:pPr>
             <a:r>
-              <a:rPr sz="1250" b="1" i="0">
+              <a:rPr sz="1450" b="1" i="0">
                 <a:solidFill>
                   <a:srgbClr val="FFFFFF"/>
                 </a:solidFill>
@@ -25480,20 +25758,20 @@
       </p:sp>
       <p:sp>
         <p:nvSpPr>
-          <p:cNvPr id="12" name="Right Arrow 11"/>
+          <p:cNvPr id="12" name="Chevron 11"/>
           <p:cNvSpPr/>
           <p:nvPr/>
         </p:nvSpPr>
         <p:spPr>
           <a:xfrm>
-            <a:off x="7351775" y="2962656"/>
-            <a:ext cx="347472" cy="292608"/>
-          </a:xfrm>
-          <a:prstGeom prst="rightArrow">
+            <a:off x="7324344" y="2697480"/>
+            <a:ext cx="3429000" cy="1051560"/>
+          </a:xfrm>
+          <a:prstGeom prst="chevron">
             <a:avLst/>
           </a:prstGeom>
           <a:solidFill>
-            <a:srgbClr val="008074"/>
+            <a:srgbClr val="083469"/>
           </a:solidFill>
           <a:ln>
             <a:noFill/>
@@ -25524,62 +25802,14 @@
       </p:sp>
       <p:sp>
         <p:nvSpPr>
-          <p:cNvPr id="13" name="Rounded Rectangle 12"/>
-          <p:cNvSpPr/>
-          <p:nvPr/>
-        </p:nvSpPr>
-        <p:spPr>
-          <a:xfrm>
-            <a:off x="7818119" y="2743200"/>
-            <a:ext cx="2103120" cy="731520"/>
-          </a:xfrm>
-          <a:prstGeom prst="roundRect">
-            <a:avLst>
-              <a:gd name="adj" fmla="val 8000"/>
-            </a:avLst>
-          </a:prstGeom>
-          <a:solidFill>
-            <a:srgbClr val="FFFFFF"/>
-          </a:solidFill>
-          <a:ln w="19050">
-            <a:solidFill>
-              <a:srgbClr val="008074"/>
-            </a:solidFill>
-          </a:ln>
-          <a:effectLst/>
-        </p:spPr>
-        <p:style>
-          <a:lnRef idx="1">
-            <a:schemeClr val="accent1"/>
-          </a:lnRef>
-          <a:fillRef idx="3">
-            <a:schemeClr val="accent1"/>
-          </a:fillRef>
-          <a:effectRef idx="2">
-            <a:schemeClr val="accent1"/>
-          </a:effectRef>
-          <a:fontRef idx="minor">
-            <a:schemeClr val="lt1"/>
-          </a:fontRef>
-        </p:style>
-        <p:txBody>
-          <a:bodyPr rtlCol="0" anchor="ctr"/>
-          <a:lstStyle/>
-          <a:p>
-            <a:pPr algn="ctr"/>
-          </a:p>
-        </p:txBody>
-      </p:sp>
-      <p:sp>
-        <p:nvSpPr>
-          <p:cNvPr id="14" name="TextBox 13"/>
+          <p:cNvPr id="13" name="TextBox 12"/>
           <p:cNvSpPr txBox="1"/>
           <p:nvPr/>
         </p:nvSpPr>
         <p:spPr>
           <a:xfrm>
-            <a:off x="7818119" y="2962656"/>
-            <a:ext cx="2103120" cy="365760"/>
+            <a:off x="7598664" y="3081528"/>
+            <a:ext cx="3017520" cy="365760"/>
           </a:xfrm>
           <a:prstGeom prst="rect">
             <a:avLst/>
@@ -25598,9 +25828,9 @@
               </a:lnSpc>
             </a:pPr>
             <a:r>
-              <a:rPr sz="1250" b="1" i="0">
-                <a:solidFill>
-                  <a:srgbClr val="008074"/>
+              <a:rPr sz="1450" b="1" i="0">
+                <a:solidFill>
+                  <a:srgbClr val="FFFFFF"/>
                 </a:solidFill>
                 <a:latin typeface="Arial"/>
               </a:rPr>
@@ -25611,14 +25841,14 @@
       </p:sp>
       <p:sp>
         <p:nvSpPr>
-          <p:cNvPr id="15" name="TextBox 14"/>
+          <p:cNvPr id="14" name="TextBox 13"/>
           <p:cNvSpPr txBox="1"/>
           <p:nvPr/>
         </p:nvSpPr>
         <p:spPr>
           <a:xfrm>
-            <a:off x="1874519" y="3749039"/>
-            <a:ext cx="8458200" cy="365760"/>
+            <a:off x="1051560" y="4114800"/>
+            <a:ext cx="9701784" cy="365760"/>
           </a:xfrm>
           <a:prstGeom prst="rect">
             <a:avLst/>
@@ -25637,7 +25867,7 @@
               </a:lnSpc>
             </a:pPr>
             <a:r>
-              <a:rPr sz="1300" b="0" i="1">
+              <a:rPr sz="1350" b="0" i="1">
                 <a:solidFill>
                   <a:srgbClr val="595959"/>
                 </a:solidFill>
@@ -25650,13 +25880,13 @@
       </p:sp>
       <p:sp>
         <p:nvSpPr>
-          <p:cNvPr id="16" name="TextBox 15"/>
+          <p:cNvPr id="15" name="TextBox 14"/>
           <p:cNvSpPr txBox="1"/>
           <p:nvPr/>
         </p:nvSpPr>
         <p:spPr>
           <a:xfrm>
-            <a:off x="822960" y="4846320"/>
+            <a:off x="822960" y="4983480"/>
             <a:ext cx="10607040" cy="457200"/>
           </a:xfrm>
           <a:prstGeom prst="rect">
@@ -25749,14 +25979,102 @@
       </p:sp>
       <p:sp>
         <p:nvSpPr>
-          <p:cNvPr id="6" name="Rounded Rectangle 5"/>
+          <p:cNvPr id="6" name="Rectangle 5"/>
           <p:cNvSpPr/>
           <p:nvPr/>
         </p:nvSpPr>
         <p:spPr>
           <a:xfrm>
-            <a:off x="868680" y="1965960"/>
-            <a:ext cx="3246120" cy="3337560"/>
+            <a:off x="10744200" y="-1188720"/>
+            <a:ext cx="2286000" cy="2286000"/>
+          </a:xfrm>
+          <a:prstGeom prst="rect">
+            <a:avLst/>
+          </a:prstGeom>
+          <a:noFill/>
+          <a:ln w="31750">
+            <a:solidFill>
+              <a:srgbClr val="E6ECEE"/>
+            </a:solidFill>
+          </a:ln>
+          <a:effectLst/>
+        </p:spPr>
+        <p:style>
+          <a:lnRef idx="1">
+            <a:schemeClr val="accent1"/>
+          </a:lnRef>
+          <a:fillRef idx="3">
+            <a:schemeClr val="accent1"/>
+          </a:fillRef>
+          <a:effectRef idx="2">
+            <a:schemeClr val="accent1"/>
+          </a:effectRef>
+          <a:fontRef idx="minor">
+            <a:schemeClr val="lt1"/>
+          </a:fontRef>
+        </p:style>
+        <p:txBody>
+          <a:bodyPr rtlCol="0" anchor="ctr"/>
+          <a:lstStyle/>
+          <a:p>
+            <a:pPr algn="ctr"/>
+          </a:p>
+        </p:txBody>
+      </p:sp>
+      <p:sp>
+        <p:nvSpPr>
+          <p:cNvPr id="7" name="Rectangle 6"/>
+          <p:cNvSpPr/>
+          <p:nvPr/>
+        </p:nvSpPr>
+        <p:spPr>
+          <a:xfrm>
+            <a:off x="11384280" y="-548640"/>
+            <a:ext cx="2103120" cy="2103120"/>
+          </a:xfrm>
+          <a:prstGeom prst="rect">
+            <a:avLst/>
+          </a:prstGeom>
+          <a:noFill/>
+          <a:ln w="31750">
+            <a:solidFill>
+              <a:srgbClr val="D0EAE9"/>
+            </a:solidFill>
+          </a:ln>
+          <a:effectLst/>
+        </p:spPr>
+        <p:style>
+          <a:lnRef idx="1">
+            <a:schemeClr val="accent1"/>
+          </a:lnRef>
+          <a:fillRef idx="3">
+            <a:schemeClr val="accent1"/>
+          </a:fillRef>
+          <a:effectRef idx="2">
+            <a:schemeClr val="accent1"/>
+          </a:effectRef>
+          <a:fontRef idx="minor">
+            <a:schemeClr val="lt1"/>
+          </a:fontRef>
+        </p:style>
+        <p:txBody>
+          <a:bodyPr rtlCol="0" anchor="ctr"/>
+          <a:lstStyle/>
+          <a:p>
+            <a:pPr algn="ctr"/>
+          </a:p>
+        </p:txBody>
+      </p:sp>
+      <p:sp>
+        <p:nvSpPr>
+          <p:cNvPr id="8" name="Rounded Rectangle 7"/>
+          <p:cNvSpPr/>
+          <p:nvPr/>
+        </p:nvSpPr>
+        <p:spPr>
+          <a:xfrm>
+            <a:off x="868680" y="2103120"/>
+            <a:ext cx="3246120" cy="3520440"/>
           </a:xfrm>
           <a:prstGeom prst="roundRect">
             <a:avLst>
@@ -25797,13 +26115,13 @@
       </p:sp>
       <p:sp>
         <p:nvSpPr>
-          <p:cNvPr id="7" name="Rectangle 6"/>
+          <p:cNvPr id="9" name="Rectangle 8"/>
           <p:cNvSpPr/>
           <p:nvPr/>
         </p:nvSpPr>
         <p:spPr>
           <a:xfrm>
-            <a:off x="868680" y="1965960"/>
+            <a:off x="868680" y="2103120"/>
             <a:ext cx="3246120" cy="457200"/>
           </a:xfrm>
           <a:prstGeom prst="rect">
@@ -25841,14 +26159,14 @@
       </p:sp>
       <p:sp>
         <p:nvSpPr>
-          <p:cNvPr id="8" name="TextBox 7"/>
+          <p:cNvPr id="10" name="TextBox 9"/>
           <p:cNvSpPr txBox="1"/>
           <p:nvPr/>
         </p:nvSpPr>
         <p:spPr>
           <a:xfrm>
-            <a:off x="868680" y="2075688"/>
-            <a:ext cx="3246120" cy="320040"/>
+            <a:off x="1097280" y="2212848"/>
+            <a:ext cx="2331720" cy="320040"/>
           </a:xfrm>
           <a:prstGeom prst="rect">
             <a:avLst/>
@@ -25861,7 +26179,7 @@
           </a:bodyPr>
           <a:lstStyle/>
           <a:p>
-            <a:pPr algn="ctr">
+            <a:pPr algn="l">
               <a:lnSpc>
                 <a:spcPct val="100000"/>
               </a:lnSpc>
@@ -25880,14 +26198,324 @@
       </p:sp>
       <p:sp>
         <p:nvSpPr>
-          <p:cNvPr id="9" name="TextBox 8"/>
+          <p:cNvPr id="11" name="Oval 10"/>
+          <p:cNvSpPr/>
+          <p:nvPr/>
+        </p:nvSpPr>
+        <p:spPr>
+          <a:xfrm>
+            <a:off x="3191256" y="2203703"/>
+            <a:ext cx="713232" cy="713232"/>
+          </a:xfrm>
+          <a:prstGeom prst="ellipse">
+            <a:avLst/>
+          </a:prstGeom>
+          <a:solidFill>
+            <a:srgbClr val="FFFFFF"/>
+          </a:solidFill>
+          <a:ln w="22225">
+            <a:solidFill>
+              <a:srgbClr val="008074"/>
+            </a:solidFill>
+          </a:ln>
+          <a:effectLst/>
+        </p:spPr>
+        <p:style>
+          <a:lnRef idx="1">
+            <a:schemeClr val="accent1"/>
+          </a:lnRef>
+          <a:fillRef idx="3">
+            <a:schemeClr val="accent1"/>
+          </a:fillRef>
+          <a:effectRef idx="2">
+            <a:schemeClr val="accent1"/>
+          </a:effectRef>
+          <a:fontRef idx="minor">
+            <a:schemeClr val="lt1"/>
+          </a:fontRef>
+        </p:style>
+        <p:txBody>
+          <a:bodyPr rtlCol="0" anchor="ctr"/>
+          <a:lstStyle/>
+          <a:p>
+            <a:pPr algn="ctr"/>
+          </a:p>
+        </p:txBody>
+      </p:sp>
+      <p:sp>
+        <p:nvSpPr>
+          <p:cNvPr id="12" name="Oval 11"/>
+          <p:cNvSpPr/>
+          <p:nvPr/>
+        </p:nvSpPr>
+        <p:spPr>
+          <a:xfrm>
+            <a:off x="3374136" y="2423160"/>
+            <a:ext cx="54864" cy="54864"/>
+          </a:xfrm>
+          <a:prstGeom prst="ellipse">
+            <a:avLst/>
+          </a:prstGeom>
+          <a:solidFill>
+            <a:srgbClr val="008074"/>
+          </a:solidFill>
+          <a:ln>
+            <a:noFill/>
+          </a:ln>
+          <a:effectLst/>
+        </p:spPr>
+        <p:style>
+          <a:lnRef idx="1">
+            <a:schemeClr val="accent1"/>
+          </a:lnRef>
+          <a:fillRef idx="3">
+            <a:schemeClr val="accent1"/>
+          </a:fillRef>
+          <a:effectRef idx="2">
+            <a:schemeClr val="accent1"/>
+          </a:effectRef>
+          <a:fontRef idx="minor">
+            <a:schemeClr val="lt1"/>
+          </a:fontRef>
+        </p:style>
+        <p:txBody>
+          <a:bodyPr rtlCol="0" anchor="ctr"/>
+          <a:lstStyle/>
+          <a:p>
+            <a:pPr algn="ctr"/>
+          </a:p>
+        </p:txBody>
+      </p:sp>
+      <p:sp>
+        <p:nvSpPr>
+          <p:cNvPr id="13" name="Rectangle 12"/>
+          <p:cNvSpPr/>
+          <p:nvPr/>
+        </p:nvSpPr>
+        <p:spPr>
+          <a:xfrm>
+            <a:off x="3483864" y="2434132"/>
+            <a:ext cx="237744" cy="32918"/>
+          </a:xfrm>
+          <a:prstGeom prst="rect">
+            <a:avLst/>
+          </a:prstGeom>
+          <a:solidFill>
+            <a:srgbClr val="8FADB2"/>
+          </a:solidFill>
+          <a:ln>
+            <a:noFill/>
+          </a:ln>
+          <a:effectLst/>
+        </p:spPr>
+        <p:style>
+          <a:lnRef idx="1">
+            <a:schemeClr val="accent1"/>
+          </a:lnRef>
+          <a:fillRef idx="3">
+            <a:schemeClr val="accent1"/>
+          </a:fillRef>
+          <a:effectRef idx="2">
+            <a:schemeClr val="accent1"/>
+          </a:effectRef>
+          <a:fontRef idx="minor">
+            <a:schemeClr val="lt1"/>
+          </a:fontRef>
+        </p:style>
+        <p:txBody>
+          <a:bodyPr rtlCol="0" anchor="ctr"/>
+          <a:lstStyle/>
+          <a:p>
+            <a:pPr algn="ctr"/>
+          </a:p>
+        </p:txBody>
+      </p:sp>
+      <p:sp>
+        <p:nvSpPr>
+          <p:cNvPr id="14" name="Oval 13"/>
+          <p:cNvSpPr/>
+          <p:nvPr/>
+        </p:nvSpPr>
+        <p:spPr>
+          <a:xfrm>
+            <a:off x="3374136" y="2551176"/>
+            <a:ext cx="54864" cy="54864"/>
+          </a:xfrm>
+          <a:prstGeom prst="ellipse">
+            <a:avLst/>
+          </a:prstGeom>
+          <a:solidFill>
+            <a:srgbClr val="008074"/>
+          </a:solidFill>
+          <a:ln>
+            <a:noFill/>
+          </a:ln>
+          <a:effectLst/>
+        </p:spPr>
+        <p:style>
+          <a:lnRef idx="1">
+            <a:schemeClr val="accent1"/>
+          </a:lnRef>
+          <a:fillRef idx="3">
+            <a:schemeClr val="accent1"/>
+          </a:fillRef>
+          <a:effectRef idx="2">
+            <a:schemeClr val="accent1"/>
+          </a:effectRef>
+          <a:fontRef idx="minor">
+            <a:schemeClr val="lt1"/>
+          </a:fontRef>
+        </p:style>
+        <p:txBody>
+          <a:bodyPr rtlCol="0" anchor="ctr"/>
+          <a:lstStyle/>
+          <a:p>
+            <a:pPr algn="ctr"/>
+          </a:p>
+        </p:txBody>
+      </p:sp>
+      <p:sp>
+        <p:nvSpPr>
+          <p:cNvPr id="15" name="Rectangle 14"/>
+          <p:cNvSpPr/>
+          <p:nvPr/>
+        </p:nvSpPr>
+        <p:spPr>
+          <a:xfrm>
+            <a:off x="3483864" y="2562148"/>
+            <a:ext cx="237744" cy="32918"/>
+          </a:xfrm>
+          <a:prstGeom prst="rect">
+            <a:avLst/>
+          </a:prstGeom>
+          <a:solidFill>
+            <a:srgbClr val="8FADB2"/>
+          </a:solidFill>
+          <a:ln>
+            <a:noFill/>
+          </a:ln>
+          <a:effectLst/>
+        </p:spPr>
+        <p:style>
+          <a:lnRef idx="1">
+            <a:schemeClr val="accent1"/>
+          </a:lnRef>
+          <a:fillRef idx="3">
+            <a:schemeClr val="accent1"/>
+          </a:fillRef>
+          <a:effectRef idx="2">
+            <a:schemeClr val="accent1"/>
+          </a:effectRef>
+          <a:fontRef idx="minor">
+            <a:schemeClr val="lt1"/>
+          </a:fontRef>
+        </p:style>
+        <p:txBody>
+          <a:bodyPr rtlCol="0" anchor="ctr"/>
+          <a:lstStyle/>
+          <a:p>
+            <a:pPr algn="ctr"/>
+          </a:p>
+        </p:txBody>
+      </p:sp>
+      <p:sp>
+        <p:nvSpPr>
+          <p:cNvPr id="16" name="Oval 15"/>
+          <p:cNvSpPr/>
+          <p:nvPr/>
+        </p:nvSpPr>
+        <p:spPr>
+          <a:xfrm>
+            <a:off x="3374136" y="2679191"/>
+            <a:ext cx="54864" cy="54864"/>
+          </a:xfrm>
+          <a:prstGeom prst="ellipse">
+            <a:avLst/>
+          </a:prstGeom>
+          <a:solidFill>
+            <a:srgbClr val="008074"/>
+          </a:solidFill>
+          <a:ln>
+            <a:noFill/>
+          </a:ln>
+          <a:effectLst/>
+        </p:spPr>
+        <p:style>
+          <a:lnRef idx="1">
+            <a:schemeClr val="accent1"/>
+          </a:lnRef>
+          <a:fillRef idx="3">
+            <a:schemeClr val="accent1"/>
+          </a:fillRef>
+          <a:effectRef idx="2">
+            <a:schemeClr val="accent1"/>
+          </a:effectRef>
+          <a:fontRef idx="minor">
+            <a:schemeClr val="lt1"/>
+          </a:fontRef>
+        </p:style>
+        <p:txBody>
+          <a:bodyPr rtlCol="0" anchor="ctr"/>
+          <a:lstStyle/>
+          <a:p>
+            <a:pPr algn="ctr"/>
+          </a:p>
+        </p:txBody>
+      </p:sp>
+      <p:sp>
+        <p:nvSpPr>
+          <p:cNvPr id="17" name="Rectangle 16"/>
+          <p:cNvSpPr/>
+          <p:nvPr/>
+        </p:nvSpPr>
+        <p:spPr>
+          <a:xfrm>
+            <a:off x="3483864" y="2690164"/>
+            <a:ext cx="237744" cy="32918"/>
+          </a:xfrm>
+          <a:prstGeom prst="rect">
+            <a:avLst/>
+          </a:prstGeom>
+          <a:solidFill>
+            <a:srgbClr val="8FADB2"/>
+          </a:solidFill>
+          <a:ln>
+            <a:noFill/>
+          </a:ln>
+          <a:effectLst/>
+        </p:spPr>
+        <p:style>
+          <a:lnRef idx="1">
+            <a:schemeClr val="accent1"/>
+          </a:lnRef>
+          <a:fillRef idx="3">
+            <a:schemeClr val="accent1"/>
+          </a:fillRef>
+          <a:effectRef idx="2">
+            <a:schemeClr val="accent1"/>
+          </a:effectRef>
+          <a:fontRef idx="minor">
+            <a:schemeClr val="lt1"/>
+          </a:fontRef>
+        </p:style>
+        <p:txBody>
+          <a:bodyPr rtlCol="0" anchor="ctr"/>
+          <a:lstStyle/>
+          <a:p>
+            <a:pPr algn="ctr"/>
+          </a:p>
+        </p:txBody>
+      </p:sp>
+      <p:sp>
+        <p:nvSpPr>
+          <p:cNvPr id="18" name="TextBox 17"/>
           <p:cNvSpPr txBox="1"/>
           <p:nvPr/>
         </p:nvSpPr>
         <p:spPr>
           <a:xfrm>
-            <a:off x="1143000" y="2651760"/>
-            <a:ext cx="2697479" cy="411480"/>
+            <a:off x="1143000" y="2971800"/>
+            <a:ext cx="2240279" cy="411480"/>
           </a:xfrm>
           <a:prstGeom prst="rect">
             <a:avLst/>
@@ -25919,14 +26547,58 @@
       </p:sp>
       <p:sp>
         <p:nvSpPr>
-          <p:cNvPr id="10" name="TextBox 9"/>
+          <p:cNvPr id="19" name="Oval 18"/>
+          <p:cNvSpPr/>
+          <p:nvPr/>
+        </p:nvSpPr>
+        <p:spPr>
+          <a:xfrm>
+            <a:off x="1161288" y="3584448"/>
+            <a:ext cx="82296" cy="82296"/>
+          </a:xfrm>
+          <a:prstGeom prst="ellipse">
+            <a:avLst/>
+          </a:prstGeom>
+          <a:solidFill>
+            <a:srgbClr val="008074"/>
+          </a:solidFill>
+          <a:ln>
+            <a:noFill/>
+          </a:ln>
+          <a:effectLst/>
+        </p:spPr>
+        <p:style>
+          <a:lnRef idx="1">
+            <a:schemeClr val="accent1"/>
+          </a:lnRef>
+          <a:fillRef idx="3">
+            <a:schemeClr val="accent1"/>
+          </a:fillRef>
+          <a:effectRef idx="2">
+            <a:schemeClr val="accent1"/>
+          </a:effectRef>
+          <a:fontRef idx="minor">
+            <a:schemeClr val="lt1"/>
+          </a:fontRef>
+        </p:style>
+        <p:txBody>
+          <a:bodyPr rtlCol="0" anchor="ctr"/>
+          <a:lstStyle/>
+          <a:p>
+            <a:pPr algn="ctr"/>
+          </a:p>
+        </p:txBody>
+      </p:sp>
+      <p:sp>
+        <p:nvSpPr>
+          <p:cNvPr id="20" name="TextBox 19"/>
           <p:cNvSpPr txBox="1"/>
           <p:nvPr/>
         </p:nvSpPr>
         <p:spPr>
           <a:xfrm>
-            <a:off x="1143000" y="3200400"/>
-            <a:ext cx="2697479" cy="320040"/>
+            <a:off x="1380744" y="3502152"/>
+            <a:ext cx="2459736" cy="320040"/>
           </a:xfrm>
           <a:prstGeom prst="rect">
             <a:avLst/>
@@ -25951,20 +26623,56 @@
                 </a:solidFill>
                 <a:latin typeface="Arial"/>
               </a:rPr>
-              <a:t>•  Pre-workshop survey</a:t>
+              <a:t>Pre-workshop survey</a:t>
             </a:r>
           </a:p>
         </p:txBody>
       </p:sp>
-      <p:sp>
-        <p:nvSpPr>
-          <p:cNvPr id="11" name="TextBox 10"/>
+      <p:cxnSp>
+        <p:nvCxnSpPr>
+          <p:cNvPr id="21" name="Connector 20"/>
+          <p:cNvCxnSpPr/>
+          <p:nvPr/>
+        </p:nvCxnSpPr>
+        <p:spPr>
+          <a:xfrm>
+            <a:off x="1143000" y="5001768"/>
+            <a:ext cx="2697480" cy="0"/>
+          </a:xfrm>
+          <a:prstGeom prst="line">
+            <a:avLst/>
+          </a:prstGeom>
+          <a:ln w="15240">
+            <a:solidFill>
+              <a:srgbClr val="E6ECEE"/>
+            </a:solidFill>
+          </a:ln>
+          <a:effectLst/>
+        </p:spPr>
+        <p:style>
+          <a:lnRef idx="2">
+            <a:schemeClr val="accent1"/>
+          </a:lnRef>
+          <a:fillRef idx="0">
+            <a:schemeClr val="accent1"/>
+          </a:fillRef>
+          <a:effectRef idx="1">
+            <a:schemeClr val="accent1"/>
+          </a:effectRef>
+          <a:fontRef idx="minor">
+            <a:schemeClr val="tx1"/>
+          </a:fontRef>
+        </p:style>
+      </p:cxnSp>
+      <p:sp>
+        <p:nvSpPr>
+          <p:cNvPr id="22" name="TextBox 21"/>
           <p:cNvSpPr txBox="1"/>
           <p:nvPr/>
         </p:nvSpPr>
         <p:spPr>
           <a:xfrm>
-            <a:off x="1143000" y="4800600"/>
+            <a:off x="1143000" y="5120640"/>
             <a:ext cx="2697479" cy="365760"/>
           </a:xfrm>
           <a:prstGeom prst="rect">
@@ -25997,13 +26705,13 @@
       </p:sp>
       <p:sp>
         <p:nvSpPr>
-          <p:cNvPr id="12" name="Right Arrow 11"/>
+          <p:cNvPr id="23" name="Right Arrow 22"/>
           <p:cNvSpPr/>
           <p:nvPr/>
         </p:nvSpPr>
         <p:spPr>
           <a:xfrm>
-            <a:off x="4224528" y="3479291"/>
+            <a:off x="4224528" y="3707891"/>
             <a:ext cx="347472" cy="310896"/>
           </a:xfrm>
           <a:prstGeom prst="rightArrow">
@@ -26041,14 +26749,14 @@
       </p:sp>
       <p:sp>
         <p:nvSpPr>
-          <p:cNvPr id="13" name="Rounded Rectangle 12"/>
+          <p:cNvPr id="24" name="Rounded Rectangle 23"/>
           <p:cNvSpPr/>
           <p:nvPr/>
         </p:nvSpPr>
         <p:spPr>
           <a:xfrm>
-            <a:off x="4681728" y="1965960"/>
-            <a:ext cx="3246120" cy="3337560"/>
+            <a:off x="4681728" y="2103120"/>
+            <a:ext cx="3246120" cy="3520440"/>
           </a:xfrm>
           <a:prstGeom prst="roundRect">
             <a:avLst>
@@ -26089,13 +26797,13 @@
       </p:sp>
       <p:sp>
         <p:nvSpPr>
-          <p:cNvPr id="14" name="Rectangle 13"/>
+          <p:cNvPr id="25" name="Rectangle 24"/>
           <p:cNvSpPr/>
           <p:nvPr/>
         </p:nvSpPr>
         <p:spPr>
           <a:xfrm>
-            <a:off x="4681728" y="1965960"/>
+            <a:off x="4681728" y="2103120"/>
             <a:ext cx="3246120" cy="457200"/>
           </a:xfrm>
           <a:prstGeom prst="rect">
@@ -26133,14 +26841,14 @@
       </p:sp>
       <p:sp>
         <p:nvSpPr>
-          <p:cNvPr id="15" name="TextBox 14"/>
+          <p:cNvPr id="26" name="TextBox 25"/>
           <p:cNvSpPr txBox="1"/>
           <p:nvPr/>
         </p:nvSpPr>
         <p:spPr>
           <a:xfrm>
-            <a:off x="4681728" y="2075688"/>
-            <a:ext cx="3246120" cy="320040"/>
+            <a:off x="4910328" y="2212848"/>
+            <a:ext cx="2331720" cy="320040"/>
           </a:xfrm>
           <a:prstGeom prst="rect">
             <a:avLst/>
@@ -26153,7 +26861,7 @@
           </a:bodyPr>
           <a:lstStyle/>
           <a:p>
-            <a:pPr algn="ctr">
+            <a:pPr algn="l">
               <a:lnSpc>
                 <a:spcPct val="100000"/>
               </a:lnSpc>
@@ -26172,14 +26880,194 @@
       </p:sp>
       <p:sp>
         <p:nvSpPr>
-          <p:cNvPr id="16" name="TextBox 15"/>
+          <p:cNvPr id="27" name="Oval 26"/>
+          <p:cNvSpPr/>
+          <p:nvPr/>
+        </p:nvSpPr>
+        <p:spPr>
+          <a:xfrm>
+            <a:off x="7004304" y="2203703"/>
+            <a:ext cx="713232" cy="713232"/>
+          </a:xfrm>
+          <a:prstGeom prst="ellipse">
+            <a:avLst/>
+          </a:prstGeom>
+          <a:solidFill>
+            <a:srgbClr val="FFFFFF"/>
+          </a:solidFill>
+          <a:ln w="22225">
+            <a:solidFill>
+              <a:srgbClr val="008074"/>
+            </a:solidFill>
+          </a:ln>
+          <a:effectLst/>
+        </p:spPr>
+        <p:style>
+          <a:lnRef idx="1">
+            <a:schemeClr val="accent1"/>
+          </a:lnRef>
+          <a:fillRef idx="3">
+            <a:schemeClr val="accent1"/>
+          </a:fillRef>
+          <a:effectRef idx="2">
+            <a:schemeClr val="accent1"/>
+          </a:effectRef>
+          <a:fontRef idx="minor">
+            <a:schemeClr val="lt1"/>
+          </a:fontRef>
+        </p:style>
+        <p:txBody>
+          <a:bodyPr rtlCol="0" anchor="ctr"/>
+          <a:lstStyle/>
+          <a:p>
+            <a:pPr algn="ctr"/>
+          </a:p>
+        </p:txBody>
+      </p:sp>
+      <p:sp>
+        <p:nvSpPr>
+          <p:cNvPr id="28" name="Folded Corner 27"/>
+          <p:cNvSpPr/>
+          <p:nvPr/>
+        </p:nvSpPr>
+        <p:spPr>
+          <a:xfrm>
+            <a:off x="7223760" y="2377439"/>
+            <a:ext cx="274320" cy="365760"/>
+          </a:xfrm>
+          <a:prstGeom prst="foldedCorner">
+            <a:avLst/>
+          </a:prstGeom>
+          <a:solidFill>
+            <a:srgbClr val="FFFFFF"/>
+          </a:solidFill>
+          <a:ln w="19050">
+            <a:solidFill>
+              <a:srgbClr val="008074"/>
+            </a:solidFill>
+          </a:ln>
+          <a:effectLst/>
+        </p:spPr>
+        <p:style>
+          <a:lnRef idx="1">
+            <a:schemeClr val="accent1"/>
+          </a:lnRef>
+          <a:fillRef idx="3">
+            <a:schemeClr val="accent1"/>
+          </a:fillRef>
+          <a:effectRef idx="2">
+            <a:schemeClr val="accent1"/>
+          </a:effectRef>
+          <a:fontRef idx="minor">
+            <a:schemeClr val="lt1"/>
+          </a:fontRef>
+        </p:style>
+        <p:txBody>
+          <a:bodyPr rtlCol="0" anchor="ctr"/>
+          <a:lstStyle/>
+          <a:p>
+            <a:pPr algn="ctr"/>
+          </a:p>
+        </p:txBody>
+      </p:sp>
+      <p:sp>
+        <p:nvSpPr>
+          <p:cNvPr id="29" name="Rectangle 28"/>
+          <p:cNvSpPr/>
+          <p:nvPr/>
+        </p:nvSpPr>
+        <p:spPr>
+          <a:xfrm>
+            <a:off x="7287768" y="2487168"/>
+            <a:ext cx="146304" cy="29260"/>
+          </a:xfrm>
+          <a:prstGeom prst="rect">
+            <a:avLst/>
+          </a:prstGeom>
+          <a:solidFill>
+            <a:srgbClr val="8FADB2"/>
+          </a:solidFill>
+          <a:ln>
+            <a:noFill/>
+          </a:ln>
+          <a:effectLst/>
+        </p:spPr>
+        <p:style>
+          <a:lnRef idx="1">
+            <a:schemeClr val="accent1"/>
+          </a:lnRef>
+          <a:fillRef idx="3">
+            <a:schemeClr val="accent1"/>
+          </a:fillRef>
+          <a:effectRef idx="2">
+            <a:schemeClr val="accent1"/>
+          </a:effectRef>
+          <a:fontRef idx="minor">
+            <a:schemeClr val="lt1"/>
+          </a:fontRef>
+        </p:style>
+        <p:txBody>
+          <a:bodyPr rtlCol="0" anchor="ctr"/>
+          <a:lstStyle/>
+          <a:p>
+            <a:pPr algn="ctr"/>
+          </a:p>
+        </p:txBody>
+      </p:sp>
+      <p:sp>
+        <p:nvSpPr>
+          <p:cNvPr id="30" name="Rectangle 29"/>
+          <p:cNvSpPr/>
+          <p:nvPr/>
+        </p:nvSpPr>
+        <p:spPr>
+          <a:xfrm>
+            <a:off x="7287768" y="2587751"/>
+            <a:ext cx="146304" cy="29260"/>
+          </a:xfrm>
+          <a:prstGeom prst="rect">
+            <a:avLst/>
+          </a:prstGeom>
+          <a:solidFill>
+            <a:srgbClr val="8FADB2"/>
+          </a:solidFill>
+          <a:ln>
+            <a:noFill/>
+          </a:ln>
+          <a:effectLst/>
+        </p:spPr>
+        <p:style>
+          <a:lnRef idx="1">
+            <a:schemeClr val="accent1"/>
+          </a:lnRef>
+          <a:fillRef idx="3">
+            <a:schemeClr val="accent1"/>
+          </a:fillRef>
+          <a:effectRef idx="2">
+            <a:schemeClr val="accent1"/>
+          </a:effectRef>
+          <a:fontRef idx="minor">
+            <a:schemeClr val="lt1"/>
+          </a:fontRef>
+        </p:style>
+        <p:txBody>
+          <a:bodyPr rtlCol="0" anchor="ctr"/>
+          <a:lstStyle/>
+          <a:p>
+            <a:pPr algn="ctr"/>
+          </a:p>
+        </p:txBody>
+      </p:sp>
+      <p:sp>
+        <p:nvSpPr>
+          <p:cNvPr id="31" name="TextBox 30"/>
           <p:cNvSpPr txBox="1"/>
           <p:nvPr/>
         </p:nvSpPr>
         <p:spPr>
           <a:xfrm>
-            <a:off x="4956048" y="2651760"/>
-            <a:ext cx="2697479" cy="411480"/>
+            <a:off x="4956048" y="2971800"/>
+            <a:ext cx="2240279" cy="411480"/>
           </a:xfrm>
           <a:prstGeom prst="rect">
             <a:avLst/>
@@ -26211,14 +27099,58 @@
       </p:sp>
       <p:sp>
         <p:nvSpPr>
-          <p:cNvPr id="17" name="TextBox 16"/>
+          <p:cNvPr id="32" name="Oval 31"/>
+          <p:cNvSpPr/>
+          <p:nvPr/>
+        </p:nvSpPr>
+        <p:spPr>
+          <a:xfrm>
+            <a:off x="4974336" y="3584448"/>
+            <a:ext cx="82296" cy="82296"/>
+          </a:xfrm>
+          <a:prstGeom prst="ellipse">
+            <a:avLst/>
+          </a:prstGeom>
+          <a:solidFill>
+            <a:srgbClr val="008074"/>
+          </a:solidFill>
+          <a:ln>
+            <a:noFill/>
+          </a:ln>
+          <a:effectLst/>
+        </p:spPr>
+        <p:style>
+          <a:lnRef idx="1">
+            <a:schemeClr val="accent1"/>
+          </a:lnRef>
+          <a:fillRef idx="3">
+            <a:schemeClr val="accent1"/>
+          </a:fillRef>
+          <a:effectRef idx="2">
+            <a:schemeClr val="accent1"/>
+          </a:effectRef>
+          <a:fontRef idx="minor">
+            <a:schemeClr val="lt1"/>
+          </a:fontRef>
+        </p:style>
+        <p:txBody>
+          <a:bodyPr rtlCol="0" anchor="ctr"/>
+          <a:lstStyle/>
+          <a:p>
+            <a:pPr algn="ctr"/>
+          </a:p>
+        </p:txBody>
+      </p:sp>
+      <p:sp>
+        <p:nvSpPr>
+          <p:cNvPr id="33" name="TextBox 32"/>
           <p:cNvSpPr txBox="1"/>
           <p:nvPr/>
         </p:nvSpPr>
         <p:spPr>
           <a:xfrm>
-            <a:off x="4956048" y="3200400"/>
-            <a:ext cx="2697479" cy="320040"/>
+            <a:off x="5193792" y="3502152"/>
+            <a:ext cx="2459736" cy="320040"/>
           </a:xfrm>
           <a:prstGeom prst="rect">
             <a:avLst/>
@@ -26243,21 +27175,65 @@
                 </a:solidFill>
                 <a:latin typeface="Arial"/>
               </a:rPr>
-              <a:t>•  Tipsheet</a:t>
+              <a:t>Tipsheet</a:t>
             </a:r>
           </a:p>
         </p:txBody>
       </p:sp>
       <p:sp>
         <p:nvSpPr>
-          <p:cNvPr id="18" name="TextBox 17"/>
+          <p:cNvPr id="34" name="Oval 33"/>
+          <p:cNvSpPr/>
+          <p:nvPr/>
+        </p:nvSpPr>
+        <p:spPr>
+          <a:xfrm>
+            <a:off x="4974336" y="3968496"/>
+            <a:ext cx="82296" cy="82296"/>
+          </a:xfrm>
+          <a:prstGeom prst="ellipse">
+            <a:avLst/>
+          </a:prstGeom>
+          <a:solidFill>
+            <a:srgbClr val="008074"/>
+          </a:solidFill>
+          <a:ln>
+            <a:noFill/>
+          </a:ln>
+          <a:effectLst/>
+        </p:spPr>
+        <p:style>
+          <a:lnRef idx="1">
+            <a:schemeClr val="accent1"/>
+          </a:lnRef>
+          <a:fillRef idx="3">
+            <a:schemeClr val="accent1"/>
+          </a:fillRef>
+          <a:effectRef idx="2">
+            <a:schemeClr val="accent1"/>
+          </a:effectRef>
+          <a:fontRef idx="minor">
+            <a:schemeClr val="lt1"/>
+          </a:fontRef>
+        </p:style>
+        <p:txBody>
+          <a:bodyPr rtlCol="0" anchor="ctr"/>
+          <a:lstStyle/>
+          <a:p>
+            <a:pPr algn="ctr"/>
+          </a:p>
+        </p:txBody>
+      </p:sp>
+      <p:sp>
+        <p:nvSpPr>
+          <p:cNvPr id="35" name="TextBox 34"/>
           <p:cNvSpPr txBox="1"/>
           <p:nvPr/>
         </p:nvSpPr>
         <p:spPr>
           <a:xfrm>
-            <a:off x="4956048" y="3584448"/>
-            <a:ext cx="2697479" cy="320040"/>
+            <a:off x="5193792" y="3886200"/>
+            <a:ext cx="2459736" cy="320040"/>
           </a:xfrm>
           <a:prstGeom prst="rect">
             <a:avLst/>
@@ -26282,21 +27258,65 @@
                 </a:solidFill>
                 <a:latin typeface="Arial"/>
               </a:rPr>
-              <a:t>•  Steps for success</a:t>
+              <a:t>Steps for success</a:t>
             </a:r>
           </a:p>
         </p:txBody>
       </p:sp>
       <p:sp>
         <p:nvSpPr>
-          <p:cNvPr id="19" name="TextBox 18"/>
+          <p:cNvPr id="36" name="Oval 35"/>
+          <p:cNvSpPr/>
+          <p:nvPr/>
+        </p:nvSpPr>
+        <p:spPr>
+          <a:xfrm>
+            <a:off x="4974336" y="4352544"/>
+            <a:ext cx="82296" cy="82296"/>
+          </a:xfrm>
+          <a:prstGeom prst="ellipse">
+            <a:avLst/>
+          </a:prstGeom>
+          <a:solidFill>
+            <a:srgbClr val="008074"/>
+          </a:solidFill>
+          <a:ln>
+            <a:noFill/>
+          </a:ln>
+          <a:effectLst/>
+        </p:spPr>
+        <p:style>
+          <a:lnRef idx="1">
+            <a:schemeClr val="accent1"/>
+          </a:lnRef>
+          <a:fillRef idx="3">
+            <a:schemeClr val="accent1"/>
+          </a:fillRef>
+          <a:effectRef idx="2">
+            <a:schemeClr val="accent1"/>
+          </a:effectRef>
+          <a:fontRef idx="minor">
+            <a:schemeClr val="lt1"/>
+          </a:fontRef>
+        </p:style>
+        <p:txBody>
+          <a:bodyPr rtlCol="0" anchor="ctr"/>
+          <a:lstStyle/>
+          <a:p>
+            <a:pPr algn="ctr"/>
+          </a:p>
+        </p:txBody>
+      </p:sp>
+      <p:sp>
+        <p:nvSpPr>
+          <p:cNvPr id="37" name="TextBox 36"/>
           <p:cNvSpPr txBox="1"/>
           <p:nvPr/>
         </p:nvSpPr>
         <p:spPr>
           <a:xfrm>
-            <a:off x="4956048" y="3968496"/>
-            <a:ext cx="2697479" cy="320040"/>
+            <a:off x="5193792" y="4270248"/>
+            <a:ext cx="2459736" cy="320040"/>
           </a:xfrm>
           <a:prstGeom prst="rect">
             <a:avLst/>
@@ -26321,21 +27341,65 @@
                 </a:solidFill>
                 <a:latin typeface="Arial"/>
               </a:rPr>
-              <a:t>•  Talking points</a:t>
+              <a:t>Talking points</a:t>
             </a:r>
           </a:p>
         </p:txBody>
       </p:sp>
       <p:sp>
         <p:nvSpPr>
-          <p:cNvPr id="20" name="TextBox 19"/>
+          <p:cNvPr id="38" name="Oval 37"/>
+          <p:cNvSpPr/>
+          <p:nvPr/>
+        </p:nvSpPr>
+        <p:spPr>
+          <a:xfrm>
+            <a:off x="4974336" y="4736592"/>
+            <a:ext cx="82296" cy="82296"/>
+          </a:xfrm>
+          <a:prstGeom prst="ellipse">
+            <a:avLst/>
+          </a:prstGeom>
+          <a:solidFill>
+            <a:srgbClr val="008074"/>
+          </a:solidFill>
+          <a:ln>
+            <a:noFill/>
+          </a:ln>
+          <a:effectLst/>
+        </p:spPr>
+        <p:style>
+          <a:lnRef idx="1">
+            <a:schemeClr val="accent1"/>
+          </a:lnRef>
+          <a:fillRef idx="3">
+            <a:schemeClr val="accent1"/>
+          </a:fillRef>
+          <a:effectRef idx="2">
+            <a:schemeClr val="accent1"/>
+          </a:effectRef>
+          <a:fontRef idx="minor">
+            <a:schemeClr val="lt1"/>
+          </a:fontRef>
+        </p:style>
+        <p:txBody>
+          <a:bodyPr rtlCol="0" anchor="ctr"/>
+          <a:lstStyle/>
+          <a:p>
+            <a:pPr algn="ctr"/>
+          </a:p>
+        </p:txBody>
+      </p:sp>
+      <p:sp>
+        <p:nvSpPr>
+          <p:cNvPr id="39" name="TextBox 38"/>
           <p:cNvSpPr txBox="1"/>
           <p:nvPr/>
         </p:nvSpPr>
         <p:spPr>
           <a:xfrm>
-            <a:off x="4956048" y="4352544"/>
-            <a:ext cx="2697479" cy="320040"/>
+            <a:off x="5193792" y="4654296"/>
+            <a:ext cx="2459736" cy="320040"/>
           </a:xfrm>
           <a:prstGeom prst="rect">
             <a:avLst/>
@@ -26360,20 +27424,56 @@
                 </a:solidFill>
                 <a:latin typeface="Arial"/>
               </a:rPr>
-              <a:t>•  Client-facing deck</a:t>
+              <a:t>Client-facing deck</a:t>
             </a:r>
           </a:p>
         </p:txBody>
       </p:sp>
-      <p:sp>
-        <p:nvSpPr>
-          <p:cNvPr id="21" name="TextBox 20"/>
+      <p:cxnSp>
+        <p:nvCxnSpPr>
+          <p:cNvPr id="40" name="Connector 39"/>
+          <p:cNvCxnSpPr/>
+          <p:nvPr/>
+        </p:nvCxnSpPr>
+        <p:spPr>
+          <a:xfrm>
+            <a:off x="4956048" y="5001768"/>
+            <a:ext cx="2697479" cy="0"/>
+          </a:xfrm>
+          <a:prstGeom prst="line">
+            <a:avLst/>
+          </a:prstGeom>
+          <a:ln w="15240">
+            <a:solidFill>
+              <a:srgbClr val="E6ECEE"/>
+            </a:solidFill>
+          </a:ln>
+          <a:effectLst/>
+        </p:spPr>
+        <p:style>
+          <a:lnRef idx="2">
+            <a:schemeClr val="accent1"/>
+          </a:lnRef>
+          <a:fillRef idx="0">
+            <a:schemeClr val="accent1"/>
+          </a:fillRef>
+          <a:effectRef idx="1">
+            <a:schemeClr val="accent1"/>
+          </a:effectRef>
+          <a:fontRef idx="minor">
+            <a:schemeClr val="tx1"/>
+          </a:fontRef>
+        </p:style>
+      </p:cxnSp>
+      <p:sp>
+        <p:nvSpPr>
+          <p:cNvPr id="41" name="TextBox 40"/>
           <p:cNvSpPr txBox="1"/>
           <p:nvPr/>
         </p:nvSpPr>
         <p:spPr>
           <a:xfrm>
-            <a:off x="4956048" y="4800600"/>
+            <a:off x="4956048" y="5120640"/>
             <a:ext cx="2697479" cy="365760"/>
           </a:xfrm>
           <a:prstGeom prst="rect">
@@ -26406,13 +27506,13 @@
       </p:sp>
       <p:sp>
         <p:nvSpPr>
-          <p:cNvPr id="22" name="Right Arrow 21"/>
+          <p:cNvPr id="42" name="Right Arrow 41"/>
           <p:cNvSpPr/>
           <p:nvPr/>
         </p:nvSpPr>
         <p:spPr>
           <a:xfrm>
-            <a:off x="8037575" y="3479291"/>
+            <a:off x="8037575" y="3707891"/>
             <a:ext cx="347472" cy="310896"/>
           </a:xfrm>
           <a:prstGeom prst="rightArrow">
@@ -26450,14 +27550,14 @@
       </p:sp>
       <p:sp>
         <p:nvSpPr>
-          <p:cNvPr id="23" name="Rounded Rectangle 22"/>
+          <p:cNvPr id="43" name="Rounded Rectangle 42"/>
           <p:cNvSpPr/>
           <p:nvPr/>
         </p:nvSpPr>
         <p:spPr>
           <a:xfrm>
-            <a:off x="8494776" y="1965960"/>
-            <a:ext cx="3246120" cy="3337560"/>
+            <a:off x="8494776" y="2103120"/>
+            <a:ext cx="3246120" cy="3520440"/>
           </a:xfrm>
           <a:prstGeom prst="roundRect">
             <a:avLst>
@@ -26498,13 +27598,13 @@
       </p:sp>
       <p:sp>
         <p:nvSpPr>
-          <p:cNvPr id="24" name="Rectangle 23"/>
+          <p:cNvPr id="44" name="Rectangle 43"/>
           <p:cNvSpPr/>
           <p:nvPr/>
         </p:nvSpPr>
         <p:spPr>
           <a:xfrm>
-            <a:off x="8494776" y="1965960"/>
+            <a:off x="8494776" y="2103120"/>
             <a:ext cx="3246120" cy="457200"/>
           </a:xfrm>
           <a:prstGeom prst="rect">
@@ -26542,14 +27642,14 @@
       </p:sp>
       <p:sp>
         <p:nvSpPr>
-          <p:cNvPr id="25" name="TextBox 24"/>
+          <p:cNvPr id="45" name="TextBox 44"/>
           <p:cNvSpPr txBox="1"/>
           <p:nvPr/>
         </p:nvSpPr>
         <p:spPr>
           <a:xfrm>
-            <a:off x="8494776" y="2075688"/>
-            <a:ext cx="3246120" cy="320040"/>
+            <a:off x="8723376" y="2212848"/>
+            <a:ext cx="2331720" cy="320040"/>
           </a:xfrm>
           <a:prstGeom prst="rect">
             <a:avLst/>
@@ -26562,7 +27662,7 @@
           </a:bodyPr>
           <a:lstStyle/>
           <a:p>
-            <a:pPr algn="ctr">
+            <a:pPr algn="l">
               <a:lnSpc>
                 <a:spcPct val="100000"/>
               </a:lnSpc>
@@ -26581,14 +27681,414 @@
       </p:sp>
       <p:sp>
         <p:nvSpPr>
-          <p:cNvPr id="26" name="TextBox 25"/>
+          <p:cNvPr id="46" name="Oval 45"/>
+          <p:cNvSpPr/>
+          <p:nvPr/>
+        </p:nvSpPr>
+        <p:spPr>
+          <a:xfrm>
+            <a:off x="10817352" y="2203703"/>
+            <a:ext cx="713232" cy="713232"/>
+          </a:xfrm>
+          <a:prstGeom prst="ellipse">
+            <a:avLst/>
+          </a:prstGeom>
+          <a:solidFill>
+            <a:srgbClr val="FFFFFF"/>
+          </a:solidFill>
+          <a:ln w="22225">
+            <a:solidFill>
+              <a:srgbClr val="008074"/>
+            </a:solidFill>
+          </a:ln>
+          <a:effectLst/>
+        </p:spPr>
+        <p:style>
+          <a:lnRef idx="1">
+            <a:schemeClr val="accent1"/>
+          </a:lnRef>
+          <a:fillRef idx="3">
+            <a:schemeClr val="accent1"/>
+          </a:fillRef>
+          <a:effectRef idx="2">
+            <a:schemeClr val="accent1"/>
+          </a:effectRef>
+          <a:fontRef idx="minor">
+            <a:schemeClr val="lt1"/>
+          </a:fontRef>
+        </p:style>
+        <p:txBody>
+          <a:bodyPr rtlCol="0" anchor="ctr"/>
+          <a:lstStyle/>
+          <a:p>
+            <a:pPr algn="ctr"/>
+          </a:p>
+        </p:txBody>
+      </p:sp>
+      <p:sp>
+        <p:nvSpPr>
+          <p:cNvPr id="47" name="Rectangle 46"/>
+          <p:cNvSpPr/>
+          <p:nvPr/>
+        </p:nvSpPr>
+        <p:spPr>
+          <a:xfrm>
+            <a:off x="11000232" y="2404872"/>
+            <a:ext cx="347472" cy="310896"/>
+          </a:xfrm>
+          <a:prstGeom prst="rect">
+            <a:avLst/>
+          </a:prstGeom>
+          <a:solidFill>
+            <a:srgbClr val="FFFFFF"/>
+          </a:solidFill>
+          <a:ln w="19050">
+            <a:solidFill>
+              <a:srgbClr val="008074"/>
+            </a:solidFill>
+          </a:ln>
+          <a:effectLst/>
+        </p:spPr>
+        <p:style>
+          <a:lnRef idx="1">
+            <a:schemeClr val="accent1"/>
+          </a:lnRef>
+          <a:fillRef idx="3">
+            <a:schemeClr val="accent1"/>
+          </a:fillRef>
+          <a:effectRef idx="2">
+            <a:schemeClr val="accent1"/>
+          </a:effectRef>
+          <a:fontRef idx="minor">
+            <a:schemeClr val="lt1"/>
+          </a:fontRef>
+        </p:style>
+        <p:txBody>
+          <a:bodyPr rtlCol="0" anchor="ctr"/>
+          <a:lstStyle/>
+          <a:p>
+            <a:pPr algn="ctr"/>
+          </a:p>
+        </p:txBody>
+      </p:sp>
+      <p:sp>
+        <p:nvSpPr>
+          <p:cNvPr id="48" name="Rectangle 47"/>
+          <p:cNvSpPr/>
+          <p:nvPr/>
+        </p:nvSpPr>
+        <p:spPr>
+          <a:xfrm>
+            <a:off x="11000232" y="2404872"/>
+            <a:ext cx="347472" cy="91440"/>
+          </a:xfrm>
+          <a:prstGeom prst="rect">
+            <a:avLst/>
+          </a:prstGeom>
+          <a:solidFill>
+            <a:srgbClr val="008074"/>
+          </a:solidFill>
+          <a:ln>
+            <a:noFill/>
+          </a:ln>
+          <a:effectLst/>
+        </p:spPr>
+        <p:style>
+          <a:lnRef idx="1">
+            <a:schemeClr val="accent1"/>
+          </a:lnRef>
+          <a:fillRef idx="3">
+            <a:schemeClr val="accent1"/>
+          </a:fillRef>
+          <a:effectRef idx="2">
+            <a:schemeClr val="accent1"/>
+          </a:effectRef>
+          <a:fontRef idx="minor">
+            <a:schemeClr val="lt1"/>
+          </a:fontRef>
+        </p:style>
+        <p:txBody>
+          <a:bodyPr rtlCol="0" anchor="ctr"/>
+          <a:lstStyle/>
+          <a:p>
+            <a:pPr algn="ctr"/>
+          </a:p>
+        </p:txBody>
+      </p:sp>
+      <p:sp>
+        <p:nvSpPr>
+          <p:cNvPr id="49" name="Oval 48"/>
+          <p:cNvSpPr/>
+          <p:nvPr/>
+        </p:nvSpPr>
+        <p:spPr>
+          <a:xfrm>
+            <a:off x="11055096" y="2542032"/>
+            <a:ext cx="45720" cy="45720"/>
+          </a:xfrm>
+          <a:prstGeom prst="ellipse">
+            <a:avLst/>
+          </a:prstGeom>
+          <a:solidFill>
+            <a:srgbClr val="8FADB2"/>
+          </a:solidFill>
+          <a:ln>
+            <a:noFill/>
+          </a:ln>
+          <a:effectLst/>
+        </p:spPr>
+        <p:style>
+          <a:lnRef idx="1">
+            <a:schemeClr val="accent1"/>
+          </a:lnRef>
+          <a:fillRef idx="3">
+            <a:schemeClr val="accent1"/>
+          </a:fillRef>
+          <a:effectRef idx="2">
+            <a:schemeClr val="accent1"/>
+          </a:effectRef>
+          <a:fontRef idx="minor">
+            <a:schemeClr val="lt1"/>
+          </a:fontRef>
+        </p:style>
+        <p:txBody>
+          <a:bodyPr rtlCol="0" anchor="ctr"/>
+          <a:lstStyle/>
+          <a:p>
+            <a:pPr algn="ctr"/>
+          </a:p>
+        </p:txBody>
+      </p:sp>
+      <p:sp>
+        <p:nvSpPr>
+          <p:cNvPr id="50" name="Oval 49"/>
+          <p:cNvSpPr/>
+          <p:nvPr/>
+        </p:nvSpPr>
+        <p:spPr>
+          <a:xfrm>
+            <a:off x="11155680" y="2542032"/>
+            <a:ext cx="45720" cy="45720"/>
+          </a:xfrm>
+          <a:prstGeom prst="ellipse">
+            <a:avLst/>
+          </a:prstGeom>
+          <a:solidFill>
+            <a:srgbClr val="8FADB2"/>
+          </a:solidFill>
+          <a:ln>
+            <a:noFill/>
+          </a:ln>
+          <a:effectLst/>
+        </p:spPr>
+        <p:style>
+          <a:lnRef idx="1">
+            <a:schemeClr val="accent1"/>
+          </a:lnRef>
+          <a:fillRef idx="3">
+            <a:schemeClr val="accent1"/>
+          </a:fillRef>
+          <a:effectRef idx="2">
+            <a:schemeClr val="accent1"/>
+          </a:effectRef>
+          <a:fontRef idx="minor">
+            <a:schemeClr val="lt1"/>
+          </a:fontRef>
+        </p:style>
+        <p:txBody>
+          <a:bodyPr rtlCol="0" anchor="ctr"/>
+          <a:lstStyle/>
+          <a:p>
+            <a:pPr algn="ctr"/>
+          </a:p>
+        </p:txBody>
+      </p:sp>
+      <p:sp>
+        <p:nvSpPr>
+          <p:cNvPr id="51" name="Oval 50"/>
+          <p:cNvSpPr/>
+          <p:nvPr/>
+        </p:nvSpPr>
+        <p:spPr>
+          <a:xfrm>
+            <a:off x="11256264" y="2542032"/>
+            <a:ext cx="45720" cy="45720"/>
+          </a:xfrm>
+          <a:prstGeom prst="ellipse">
+            <a:avLst/>
+          </a:prstGeom>
+          <a:solidFill>
+            <a:srgbClr val="8FADB2"/>
+          </a:solidFill>
+          <a:ln>
+            <a:noFill/>
+          </a:ln>
+          <a:effectLst/>
+        </p:spPr>
+        <p:style>
+          <a:lnRef idx="1">
+            <a:schemeClr val="accent1"/>
+          </a:lnRef>
+          <a:fillRef idx="3">
+            <a:schemeClr val="accent1"/>
+          </a:fillRef>
+          <a:effectRef idx="2">
+            <a:schemeClr val="accent1"/>
+          </a:effectRef>
+          <a:fontRef idx="minor">
+            <a:schemeClr val="lt1"/>
+          </a:fontRef>
+        </p:style>
+        <p:txBody>
+          <a:bodyPr rtlCol="0" anchor="ctr"/>
+          <a:lstStyle/>
+          <a:p>
+            <a:pPr algn="ctr"/>
+          </a:p>
+        </p:txBody>
+      </p:sp>
+      <p:sp>
+        <p:nvSpPr>
+          <p:cNvPr id="52" name="Oval 51"/>
+          <p:cNvSpPr/>
+          <p:nvPr/>
+        </p:nvSpPr>
+        <p:spPr>
+          <a:xfrm>
+            <a:off x="11055096" y="2633472"/>
+            <a:ext cx="45720" cy="45720"/>
+          </a:xfrm>
+          <a:prstGeom prst="ellipse">
+            <a:avLst/>
+          </a:prstGeom>
+          <a:solidFill>
+            <a:srgbClr val="8FADB2"/>
+          </a:solidFill>
+          <a:ln>
+            <a:noFill/>
+          </a:ln>
+          <a:effectLst/>
+        </p:spPr>
+        <p:style>
+          <a:lnRef idx="1">
+            <a:schemeClr val="accent1"/>
+          </a:lnRef>
+          <a:fillRef idx="3">
+            <a:schemeClr val="accent1"/>
+          </a:fillRef>
+          <a:effectRef idx="2">
+            <a:schemeClr val="accent1"/>
+          </a:effectRef>
+          <a:fontRef idx="minor">
+            <a:schemeClr val="lt1"/>
+          </a:fontRef>
+        </p:style>
+        <p:txBody>
+          <a:bodyPr rtlCol="0" anchor="ctr"/>
+          <a:lstStyle/>
+          <a:p>
+            <a:pPr algn="ctr"/>
+          </a:p>
+        </p:txBody>
+      </p:sp>
+      <p:sp>
+        <p:nvSpPr>
+          <p:cNvPr id="53" name="Oval 52"/>
+          <p:cNvSpPr/>
+          <p:nvPr/>
+        </p:nvSpPr>
+        <p:spPr>
+          <a:xfrm>
+            <a:off x="11155680" y="2633472"/>
+            <a:ext cx="45720" cy="45720"/>
+          </a:xfrm>
+          <a:prstGeom prst="ellipse">
+            <a:avLst/>
+          </a:prstGeom>
+          <a:solidFill>
+            <a:srgbClr val="8FADB2"/>
+          </a:solidFill>
+          <a:ln>
+            <a:noFill/>
+          </a:ln>
+          <a:effectLst/>
+        </p:spPr>
+        <p:style>
+          <a:lnRef idx="1">
+            <a:schemeClr val="accent1"/>
+          </a:lnRef>
+          <a:fillRef idx="3">
+            <a:schemeClr val="accent1"/>
+          </a:fillRef>
+          <a:effectRef idx="2">
+            <a:schemeClr val="accent1"/>
+          </a:effectRef>
+          <a:fontRef idx="minor">
+            <a:schemeClr val="lt1"/>
+          </a:fontRef>
+        </p:style>
+        <p:txBody>
+          <a:bodyPr rtlCol="0" anchor="ctr"/>
+          <a:lstStyle/>
+          <a:p>
+            <a:pPr algn="ctr"/>
+          </a:p>
+        </p:txBody>
+      </p:sp>
+      <p:sp>
+        <p:nvSpPr>
+          <p:cNvPr id="54" name="Oval 53"/>
+          <p:cNvSpPr/>
+          <p:nvPr/>
+        </p:nvSpPr>
+        <p:spPr>
+          <a:xfrm>
+            <a:off x="11256264" y="2633472"/>
+            <a:ext cx="45720" cy="45720"/>
+          </a:xfrm>
+          <a:prstGeom prst="ellipse">
+            <a:avLst/>
+          </a:prstGeom>
+          <a:solidFill>
+            <a:srgbClr val="8FADB2"/>
+          </a:solidFill>
+          <a:ln>
+            <a:noFill/>
+          </a:ln>
+          <a:effectLst/>
+        </p:spPr>
+        <p:style>
+          <a:lnRef idx="1">
+            <a:schemeClr val="accent1"/>
+          </a:lnRef>
+          <a:fillRef idx="3">
+            <a:schemeClr val="accent1"/>
+          </a:fillRef>
+          <a:effectRef idx="2">
+            <a:schemeClr val="accent1"/>
+          </a:effectRef>
+          <a:fontRef idx="minor">
+            <a:schemeClr val="lt1"/>
+          </a:fontRef>
+        </p:style>
+        <p:txBody>
+          <a:bodyPr rtlCol="0" anchor="ctr"/>
+          <a:lstStyle/>
+          <a:p>
+            <a:pPr algn="ctr"/>
+          </a:p>
+        </p:txBody>
+      </p:sp>
+      <p:sp>
+        <p:nvSpPr>
+          <p:cNvPr id="55" name="TextBox 54"/>
           <p:cNvSpPr txBox="1"/>
           <p:nvPr/>
         </p:nvSpPr>
         <p:spPr>
           <a:xfrm>
-            <a:off x="8769096" y="2651760"/>
-            <a:ext cx="2697479" cy="411480"/>
+            <a:off x="8769096" y="2971800"/>
+            <a:ext cx="2240279" cy="411480"/>
           </a:xfrm>
           <a:prstGeom prst="rect">
             <a:avLst/>
@@ -26620,14 +28120,58 @@
       </p:sp>
       <p:sp>
         <p:nvSpPr>
-          <p:cNvPr id="27" name="TextBox 26"/>
+          <p:cNvPr id="56" name="Oval 55"/>
+          <p:cNvSpPr/>
+          <p:nvPr/>
+        </p:nvSpPr>
+        <p:spPr>
+          <a:xfrm>
+            <a:off x="8787384" y="3584448"/>
+            <a:ext cx="82296" cy="82296"/>
+          </a:xfrm>
+          <a:prstGeom prst="ellipse">
+            <a:avLst/>
+          </a:prstGeom>
+          <a:solidFill>
+            <a:srgbClr val="008074"/>
+          </a:solidFill>
+          <a:ln>
+            <a:noFill/>
+          </a:ln>
+          <a:effectLst/>
+        </p:spPr>
+        <p:style>
+          <a:lnRef idx="1">
+            <a:schemeClr val="accent1"/>
+          </a:lnRef>
+          <a:fillRef idx="3">
+            <a:schemeClr val="accent1"/>
+          </a:fillRef>
+          <a:effectRef idx="2">
+            <a:schemeClr val="accent1"/>
+          </a:effectRef>
+          <a:fontRef idx="minor">
+            <a:schemeClr val="lt1"/>
+          </a:fontRef>
+        </p:style>
+        <p:txBody>
+          <a:bodyPr rtlCol="0" anchor="ctr"/>
+          <a:lstStyle/>
+          <a:p>
+            <a:pPr algn="ctr"/>
+          </a:p>
+        </p:txBody>
+      </p:sp>
+      <p:sp>
+        <p:nvSpPr>
+          <p:cNvPr id="57" name="TextBox 56"/>
           <p:cNvSpPr txBox="1"/>
           <p:nvPr/>
         </p:nvSpPr>
         <p:spPr>
           <a:xfrm>
-            <a:off x="8769096" y="3200400"/>
-            <a:ext cx="2697479" cy="320040"/>
+            <a:off x="9006840" y="3502152"/>
+            <a:ext cx="2459736" cy="320040"/>
           </a:xfrm>
           <a:prstGeom prst="rect">
             <a:avLst/>
@@ -26652,21 +28196,65 @@
                 </a:solidFill>
                 <a:latin typeface="Arial"/>
               </a:rPr>
-              <a:t>•  Post-workshop survey</a:t>
+              <a:t>Post-workshop survey</a:t>
             </a:r>
           </a:p>
         </p:txBody>
       </p:sp>
       <p:sp>
         <p:nvSpPr>
-          <p:cNvPr id="28" name="TextBox 27"/>
+          <p:cNvPr id="58" name="Oval 57"/>
+          <p:cNvSpPr/>
+          <p:nvPr/>
+        </p:nvSpPr>
+        <p:spPr>
+          <a:xfrm>
+            <a:off x="8787384" y="3968496"/>
+            <a:ext cx="82296" cy="82296"/>
+          </a:xfrm>
+          <a:prstGeom prst="ellipse">
+            <a:avLst/>
+          </a:prstGeom>
+          <a:solidFill>
+            <a:srgbClr val="008074"/>
+          </a:solidFill>
+          <a:ln>
+            <a:noFill/>
+          </a:ln>
+          <a:effectLst/>
+        </p:spPr>
+        <p:style>
+          <a:lnRef idx="1">
+            <a:schemeClr val="accent1"/>
+          </a:lnRef>
+          <a:fillRef idx="3">
+            <a:schemeClr val="accent1"/>
+          </a:fillRef>
+          <a:effectRef idx="2">
+            <a:schemeClr val="accent1"/>
+          </a:effectRef>
+          <a:fontRef idx="minor">
+            <a:schemeClr val="lt1"/>
+          </a:fontRef>
+        </p:style>
+        <p:txBody>
+          <a:bodyPr rtlCol="0" anchor="ctr"/>
+          <a:lstStyle/>
+          <a:p>
+            <a:pPr algn="ctr"/>
+          </a:p>
+        </p:txBody>
+      </p:sp>
+      <p:sp>
+        <p:nvSpPr>
+          <p:cNvPr id="59" name="TextBox 58"/>
           <p:cNvSpPr txBox="1"/>
           <p:nvPr/>
         </p:nvSpPr>
         <p:spPr>
           <a:xfrm>
-            <a:off x="8769096" y="3584448"/>
-            <a:ext cx="2697479" cy="320040"/>
+            <a:off x="9006840" y="3886200"/>
+            <a:ext cx="2459736" cy="320040"/>
           </a:xfrm>
           <a:prstGeom prst="rect">
             <a:avLst/>
@@ -26691,20 +28279,56 @@
                 </a:solidFill>
                 <a:latin typeface="Arial"/>
               </a:rPr>
-              <a:t>•  Engagement calendar</a:t>
+              <a:t>Engagement calendar</a:t>
             </a:r>
           </a:p>
         </p:txBody>
       </p:sp>
-      <p:sp>
-        <p:nvSpPr>
-          <p:cNvPr id="29" name="TextBox 28"/>
+      <p:cxnSp>
+        <p:nvCxnSpPr>
+          <p:cNvPr id="60" name="Connector 59"/>
+          <p:cNvCxnSpPr/>
+          <p:nvPr/>
+        </p:nvCxnSpPr>
+        <p:spPr>
+          <a:xfrm>
+            <a:off x="8769096" y="5001768"/>
+            <a:ext cx="2697480" cy="0"/>
+          </a:xfrm>
+          <a:prstGeom prst="line">
+            <a:avLst/>
+          </a:prstGeom>
+          <a:ln w="15240">
+            <a:solidFill>
+              <a:srgbClr val="E6ECEE"/>
+            </a:solidFill>
+          </a:ln>
+          <a:effectLst/>
+        </p:spPr>
+        <p:style>
+          <a:lnRef idx="2">
+            <a:schemeClr val="accent1"/>
+          </a:lnRef>
+          <a:fillRef idx="0">
+            <a:schemeClr val="accent1"/>
+          </a:fillRef>
+          <a:effectRef idx="1">
+            <a:schemeClr val="accent1"/>
+          </a:effectRef>
+          <a:fontRef idx="minor">
+            <a:schemeClr val="tx1"/>
+          </a:fontRef>
+        </p:style>
+      </p:cxnSp>
+      <p:sp>
+        <p:nvSpPr>
+          <p:cNvPr id="61" name="TextBox 60"/>
           <p:cNvSpPr txBox="1"/>
           <p:nvPr/>
         </p:nvSpPr>
         <p:spPr>
           <a:xfrm>
-            <a:off x="8769096" y="4800600"/>
+            <a:off x="8769096" y="5120640"/>
             <a:ext cx="2697479" cy="365760"/>
           </a:xfrm>
           <a:prstGeom prst="rect">
@@ -26797,7 +28421,95 @@
       </p:sp>
       <p:sp>
         <p:nvSpPr>
-          <p:cNvPr id="6" name="Rounded Rectangle 5"/>
+          <p:cNvPr id="6" name="Rectangle 5"/>
+          <p:cNvSpPr/>
+          <p:nvPr/>
+        </p:nvSpPr>
+        <p:spPr>
+          <a:xfrm>
+            <a:off x="10744200" y="-1188720"/>
+            <a:ext cx="2286000" cy="2286000"/>
+          </a:xfrm>
+          <a:prstGeom prst="rect">
+            <a:avLst/>
+          </a:prstGeom>
+          <a:noFill/>
+          <a:ln w="31750">
+            <a:solidFill>
+              <a:srgbClr val="E6ECEE"/>
+            </a:solidFill>
+          </a:ln>
+          <a:effectLst/>
+        </p:spPr>
+        <p:style>
+          <a:lnRef idx="1">
+            <a:schemeClr val="accent1"/>
+          </a:lnRef>
+          <a:fillRef idx="3">
+            <a:schemeClr val="accent1"/>
+          </a:fillRef>
+          <a:effectRef idx="2">
+            <a:schemeClr val="accent1"/>
+          </a:effectRef>
+          <a:fontRef idx="minor">
+            <a:schemeClr val="lt1"/>
+          </a:fontRef>
+        </p:style>
+        <p:txBody>
+          <a:bodyPr rtlCol="0" anchor="ctr"/>
+          <a:lstStyle/>
+          <a:p>
+            <a:pPr algn="ctr"/>
+          </a:p>
+        </p:txBody>
+      </p:sp>
+      <p:sp>
+        <p:nvSpPr>
+          <p:cNvPr id="7" name="Rectangle 6"/>
+          <p:cNvSpPr/>
+          <p:nvPr/>
+        </p:nvSpPr>
+        <p:spPr>
+          <a:xfrm>
+            <a:off x="11384280" y="-548640"/>
+            <a:ext cx="2103120" cy="2103120"/>
+          </a:xfrm>
+          <a:prstGeom prst="rect">
+            <a:avLst/>
+          </a:prstGeom>
+          <a:noFill/>
+          <a:ln w="31750">
+            <a:solidFill>
+              <a:srgbClr val="D0EAE9"/>
+            </a:solidFill>
+          </a:ln>
+          <a:effectLst/>
+        </p:spPr>
+        <p:style>
+          <a:lnRef idx="1">
+            <a:schemeClr val="accent1"/>
+          </a:lnRef>
+          <a:fillRef idx="3">
+            <a:schemeClr val="accent1"/>
+          </a:fillRef>
+          <a:effectRef idx="2">
+            <a:schemeClr val="accent1"/>
+          </a:effectRef>
+          <a:fontRef idx="minor">
+            <a:schemeClr val="lt1"/>
+          </a:fontRef>
+        </p:style>
+        <p:txBody>
+          <a:bodyPr rtlCol="0" anchor="ctr"/>
+          <a:lstStyle/>
+          <a:p>
+            <a:pPr algn="ctr"/>
+          </a:p>
+        </p:txBody>
+      </p:sp>
+      <p:sp>
+        <p:nvSpPr>
+          <p:cNvPr id="8" name="Rounded Rectangle 7"/>
           <p:cNvSpPr/>
           <p:nvPr/>
         </p:nvSpPr>
@@ -26843,14 +28555,368 @@
       </p:sp>
       <p:sp>
         <p:nvSpPr>
-          <p:cNvPr id="7" name="TextBox 6"/>
+          <p:cNvPr id="9" name="Rectangle 8"/>
+          <p:cNvSpPr/>
+          <p:nvPr/>
+        </p:nvSpPr>
+        <p:spPr>
+          <a:xfrm>
+            <a:off x="868680" y="1783080"/>
+            <a:ext cx="109728" cy="2926080"/>
+          </a:xfrm>
+          <a:prstGeom prst="rect">
+            <a:avLst/>
+          </a:prstGeom>
+          <a:solidFill>
+            <a:srgbClr val="083469"/>
+          </a:solidFill>
+          <a:ln>
+            <a:noFill/>
+          </a:ln>
+          <a:effectLst/>
+        </p:spPr>
+        <p:style>
+          <a:lnRef idx="1">
+            <a:schemeClr val="accent1"/>
+          </a:lnRef>
+          <a:fillRef idx="3">
+            <a:schemeClr val="accent1"/>
+          </a:fillRef>
+          <a:effectRef idx="2">
+            <a:schemeClr val="accent1"/>
+          </a:effectRef>
+          <a:fontRef idx="minor">
+            <a:schemeClr val="lt1"/>
+          </a:fontRef>
+        </p:style>
+        <p:txBody>
+          <a:bodyPr rtlCol="0" anchor="ctr"/>
+          <a:lstStyle/>
+          <a:p>
+            <a:pPr algn="ctr"/>
+          </a:p>
+        </p:txBody>
+      </p:sp>
+      <p:sp>
+        <p:nvSpPr>
+          <p:cNvPr id="10" name="Oval 9"/>
+          <p:cNvSpPr/>
+          <p:nvPr/>
+        </p:nvSpPr>
+        <p:spPr>
+          <a:xfrm>
+            <a:off x="3191256" y="1929384"/>
+            <a:ext cx="713232" cy="713232"/>
+          </a:xfrm>
+          <a:prstGeom prst="ellipse">
+            <a:avLst/>
+          </a:prstGeom>
+          <a:solidFill>
+            <a:srgbClr val="FFFFFF"/>
+          </a:solidFill>
+          <a:ln w="22225">
+            <a:solidFill>
+              <a:srgbClr val="008074"/>
+            </a:solidFill>
+          </a:ln>
+          <a:effectLst/>
+        </p:spPr>
+        <p:style>
+          <a:lnRef idx="1">
+            <a:schemeClr val="accent1"/>
+          </a:lnRef>
+          <a:fillRef idx="3">
+            <a:schemeClr val="accent1"/>
+          </a:fillRef>
+          <a:effectRef idx="2">
+            <a:schemeClr val="accent1"/>
+          </a:effectRef>
+          <a:fontRef idx="minor">
+            <a:schemeClr val="lt1"/>
+          </a:fontRef>
+        </p:style>
+        <p:txBody>
+          <a:bodyPr rtlCol="0" anchor="ctr"/>
+          <a:lstStyle/>
+          <a:p>
+            <a:pPr algn="ctr"/>
+          </a:p>
+        </p:txBody>
+      </p:sp>
+      <p:sp>
+        <p:nvSpPr>
+          <p:cNvPr id="11" name="Oval 10"/>
+          <p:cNvSpPr/>
+          <p:nvPr/>
+        </p:nvSpPr>
+        <p:spPr>
+          <a:xfrm>
+            <a:off x="3374136" y="2148840"/>
+            <a:ext cx="54864" cy="54864"/>
+          </a:xfrm>
+          <a:prstGeom prst="ellipse">
+            <a:avLst/>
+          </a:prstGeom>
+          <a:solidFill>
+            <a:srgbClr val="008074"/>
+          </a:solidFill>
+          <a:ln>
+            <a:noFill/>
+          </a:ln>
+          <a:effectLst/>
+        </p:spPr>
+        <p:style>
+          <a:lnRef idx="1">
+            <a:schemeClr val="accent1"/>
+          </a:lnRef>
+          <a:fillRef idx="3">
+            <a:schemeClr val="accent1"/>
+          </a:fillRef>
+          <a:effectRef idx="2">
+            <a:schemeClr val="accent1"/>
+          </a:effectRef>
+          <a:fontRef idx="minor">
+            <a:schemeClr val="lt1"/>
+          </a:fontRef>
+        </p:style>
+        <p:txBody>
+          <a:bodyPr rtlCol="0" anchor="ctr"/>
+          <a:lstStyle/>
+          <a:p>
+            <a:pPr algn="ctr"/>
+          </a:p>
+        </p:txBody>
+      </p:sp>
+      <p:sp>
+        <p:nvSpPr>
+          <p:cNvPr id="12" name="Rectangle 11"/>
+          <p:cNvSpPr/>
+          <p:nvPr/>
+        </p:nvSpPr>
+        <p:spPr>
+          <a:xfrm>
+            <a:off x="3483864" y="2159812"/>
+            <a:ext cx="237744" cy="32918"/>
+          </a:xfrm>
+          <a:prstGeom prst="rect">
+            <a:avLst/>
+          </a:prstGeom>
+          <a:solidFill>
+            <a:srgbClr val="8FADB2"/>
+          </a:solidFill>
+          <a:ln>
+            <a:noFill/>
+          </a:ln>
+          <a:effectLst/>
+        </p:spPr>
+        <p:style>
+          <a:lnRef idx="1">
+            <a:schemeClr val="accent1"/>
+          </a:lnRef>
+          <a:fillRef idx="3">
+            <a:schemeClr val="accent1"/>
+          </a:fillRef>
+          <a:effectRef idx="2">
+            <a:schemeClr val="accent1"/>
+          </a:effectRef>
+          <a:fontRef idx="minor">
+            <a:schemeClr val="lt1"/>
+          </a:fontRef>
+        </p:style>
+        <p:txBody>
+          <a:bodyPr rtlCol="0" anchor="ctr"/>
+          <a:lstStyle/>
+          <a:p>
+            <a:pPr algn="ctr"/>
+          </a:p>
+        </p:txBody>
+      </p:sp>
+      <p:sp>
+        <p:nvSpPr>
+          <p:cNvPr id="13" name="Oval 12"/>
+          <p:cNvSpPr/>
+          <p:nvPr/>
+        </p:nvSpPr>
+        <p:spPr>
+          <a:xfrm>
+            <a:off x="3374136" y="2276856"/>
+            <a:ext cx="54864" cy="54864"/>
+          </a:xfrm>
+          <a:prstGeom prst="ellipse">
+            <a:avLst/>
+          </a:prstGeom>
+          <a:solidFill>
+            <a:srgbClr val="008074"/>
+          </a:solidFill>
+          <a:ln>
+            <a:noFill/>
+          </a:ln>
+          <a:effectLst/>
+        </p:spPr>
+        <p:style>
+          <a:lnRef idx="1">
+            <a:schemeClr val="accent1"/>
+          </a:lnRef>
+          <a:fillRef idx="3">
+            <a:schemeClr val="accent1"/>
+          </a:fillRef>
+          <a:effectRef idx="2">
+            <a:schemeClr val="accent1"/>
+          </a:effectRef>
+          <a:fontRef idx="minor">
+            <a:schemeClr val="lt1"/>
+          </a:fontRef>
+        </p:style>
+        <p:txBody>
+          <a:bodyPr rtlCol="0" anchor="ctr"/>
+          <a:lstStyle/>
+          <a:p>
+            <a:pPr algn="ctr"/>
+          </a:p>
+        </p:txBody>
+      </p:sp>
+      <p:sp>
+        <p:nvSpPr>
+          <p:cNvPr id="14" name="Rectangle 13"/>
+          <p:cNvSpPr/>
+          <p:nvPr/>
+        </p:nvSpPr>
+        <p:spPr>
+          <a:xfrm>
+            <a:off x="3483864" y="2287828"/>
+            <a:ext cx="237744" cy="32918"/>
+          </a:xfrm>
+          <a:prstGeom prst="rect">
+            <a:avLst/>
+          </a:prstGeom>
+          <a:solidFill>
+            <a:srgbClr val="8FADB2"/>
+          </a:solidFill>
+          <a:ln>
+            <a:noFill/>
+          </a:ln>
+          <a:effectLst/>
+        </p:spPr>
+        <p:style>
+          <a:lnRef idx="1">
+            <a:schemeClr val="accent1"/>
+          </a:lnRef>
+          <a:fillRef idx="3">
+            <a:schemeClr val="accent1"/>
+          </a:fillRef>
+          <a:effectRef idx="2">
+            <a:schemeClr val="accent1"/>
+          </a:effectRef>
+          <a:fontRef idx="minor">
+            <a:schemeClr val="lt1"/>
+          </a:fontRef>
+        </p:style>
+        <p:txBody>
+          <a:bodyPr rtlCol="0" anchor="ctr"/>
+          <a:lstStyle/>
+          <a:p>
+            <a:pPr algn="ctr"/>
+          </a:p>
+        </p:txBody>
+      </p:sp>
+      <p:sp>
+        <p:nvSpPr>
+          <p:cNvPr id="15" name="Oval 14"/>
+          <p:cNvSpPr/>
+          <p:nvPr/>
+        </p:nvSpPr>
+        <p:spPr>
+          <a:xfrm>
+            <a:off x="3374136" y="2404872"/>
+            <a:ext cx="54864" cy="54864"/>
+          </a:xfrm>
+          <a:prstGeom prst="ellipse">
+            <a:avLst/>
+          </a:prstGeom>
+          <a:solidFill>
+            <a:srgbClr val="008074"/>
+          </a:solidFill>
+          <a:ln>
+            <a:noFill/>
+          </a:ln>
+          <a:effectLst/>
+        </p:spPr>
+        <p:style>
+          <a:lnRef idx="1">
+            <a:schemeClr val="accent1"/>
+          </a:lnRef>
+          <a:fillRef idx="3">
+            <a:schemeClr val="accent1"/>
+          </a:fillRef>
+          <a:effectRef idx="2">
+            <a:schemeClr val="accent1"/>
+          </a:effectRef>
+          <a:fontRef idx="minor">
+            <a:schemeClr val="lt1"/>
+          </a:fontRef>
+        </p:style>
+        <p:txBody>
+          <a:bodyPr rtlCol="0" anchor="ctr"/>
+          <a:lstStyle/>
+          <a:p>
+            <a:pPr algn="ctr"/>
+          </a:p>
+        </p:txBody>
+      </p:sp>
+      <p:sp>
+        <p:nvSpPr>
+          <p:cNvPr id="16" name="Rectangle 15"/>
+          <p:cNvSpPr/>
+          <p:nvPr/>
+        </p:nvSpPr>
+        <p:spPr>
+          <a:xfrm>
+            <a:off x="3483864" y="2415844"/>
+            <a:ext cx="237744" cy="32918"/>
+          </a:xfrm>
+          <a:prstGeom prst="rect">
+            <a:avLst/>
+          </a:prstGeom>
+          <a:solidFill>
+            <a:srgbClr val="8FADB2"/>
+          </a:solidFill>
+          <a:ln>
+            <a:noFill/>
+          </a:ln>
+          <a:effectLst/>
+        </p:spPr>
+        <p:style>
+          <a:lnRef idx="1">
+            <a:schemeClr val="accent1"/>
+          </a:lnRef>
+          <a:fillRef idx="3">
+            <a:schemeClr val="accent1"/>
+          </a:fillRef>
+          <a:effectRef idx="2">
+            <a:schemeClr val="accent1"/>
+          </a:effectRef>
+          <a:fontRef idx="minor">
+            <a:schemeClr val="lt1"/>
+          </a:fontRef>
+        </p:style>
+        <p:txBody>
+          <a:bodyPr rtlCol="0" anchor="ctr"/>
+          <a:lstStyle/>
+          <a:p>
+            <a:pPr algn="ctr"/>
+          </a:p>
+        </p:txBody>
+      </p:sp>
+      <p:sp>
+        <p:nvSpPr>
+          <p:cNvPr id="17" name="TextBox 16"/>
           <p:cNvSpPr txBox="1"/>
           <p:nvPr/>
         </p:nvSpPr>
         <p:spPr>
           <a:xfrm>
-            <a:off x="1143000" y="1984248"/>
-            <a:ext cx="2697479" cy="320040"/>
+            <a:off x="1188719" y="2011680"/>
+            <a:ext cx="1874519" cy="320040"/>
           </a:xfrm>
           <a:prstGeom prst="rect">
             <a:avLst/>
@@ -26882,14 +28948,14 @@
       </p:sp>
       <p:sp>
         <p:nvSpPr>
-          <p:cNvPr id="8" name="TextBox 7"/>
+          <p:cNvPr id="18" name="TextBox 17"/>
           <p:cNvSpPr txBox="1"/>
           <p:nvPr/>
         </p:nvSpPr>
         <p:spPr>
           <a:xfrm>
-            <a:off x="1143000" y="2331720"/>
-            <a:ext cx="2697479" cy="640080"/>
+            <a:off x="1188719" y="2350008"/>
+            <a:ext cx="1874519" cy="685800"/>
           </a:xfrm>
           <a:prstGeom prst="rect">
             <a:avLst/>
@@ -26921,14 +28987,58 @@
       </p:sp>
       <p:sp>
         <p:nvSpPr>
-          <p:cNvPr id="9" name="TextBox 8"/>
+          <p:cNvPr id="19" name="Oval 18"/>
+          <p:cNvSpPr/>
+          <p:nvPr/>
+        </p:nvSpPr>
+        <p:spPr>
+          <a:xfrm>
+            <a:off x="1207007" y="3209544"/>
+            <a:ext cx="82296" cy="82296"/>
+          </a:xfrm>
+          <a:prstGeom prst="ellipse">
+            <a:avLst/>
+          </a:prstGeom>
+          <a:solidFill>
+            <a:srgbClr val="008074"/>
+          </a:solidFill>
+          <a:ln>
+            <a:noFill/>
+          </a:ln>
+          <a:effectLst/>
+        </p:spPr>
+        <p:style>
+          <a:lnRef idx="1">
+            <a:schemeClr val="accent1"/>
+          </a:lnRef>
+          <a:fillRef idx="3">
+            <a:schemeClr val="accent1"/>
+          </a:fillRef>
+          <a:effectRef idx="2">
+            <a:schemeClr val="accent1"/>
+          </a:effectRef>
+          <a:fontRef idx="minor">
+            <a:schemeClr val="lt1"/>
+          </a:fontRef>
+        </p:style>
+        <p:txBody>
+          <a:bodyPr rtlCol="0" anchor="ctr"/>
+          <a:lstStyle/>
+          <a:p>
+            <a:pPr algn="ctr"/>
+          </a:p>
+        </p:txBody>
+      </p:sp>
+      <p:sp>
+        <p:nvSpPr>
+          <p:cNvPr id="20" name="TextBox 19"/>
           <p:cNvSpPr txBox="1"/>
           <p:nvPr/>
         </p:nvSpPr>
         <p:spPr>
           <a:xfrm>
-            <a:off x="1143000" y="3108960"/>
-            <a:ext cx="2697479" cy="320040"/>
+            <a:off x="1426464" y="3127248"/>
+            <a:ext cx="2423160" cy="320040"/>
           </a:xfrm>
           <a:prstGeom prst="rect">
             <a:avLst/>
@@ -26953,14 +29063,14 @@
                 </a:solidFill>
                 <a:latin typeface="Arial"/>
               </a:rPr>
-              <a:t>•  Pre-workshop survey</a:t>
+              <a:t>Pre-workshop survey</a:t>
             </a:r>
           </a:p>
         </p:txBody>
       </p:sp>
       <p:sp>
         <p:nvSpPr>
-          <p:cNvPr id="10" name="Rounded Rectangle 9"/>
+          <p:cNvPr id="21" name="Rounded Rectangle 20"/>
           <p:cNvSpPr/>
           <p:nvPr/>
         </p:nvSpPr>
@@ -27006,14 +29116,238 @@
       </p:sp>
       <p:sp>
         <p:nvSpPr>
-          <p:cNvPr id="11" name="TextBox 10"/>
+          <p:cNvPr id="22" name="Rectangle 21"/>
+          <p:cNvSpPr/>
+          <p:nvPr/>
+        </p:nvSpPr>
+        <p:spPr>
+          <a:xfrm>
+            <a:off x="4681728" y="1783080"/>
+            <a:ext cx="109728" cy="2926080"/>
+          </a:xfrm>
+          <a:prstGeom prst="rect">
+            <a:avLst/>
+          </a:prstGeom>
+          <a:solidFill>
+            <a:srgbClr val="008074"/>
+          </a:solidFill>
+          <a:ln>
+            <a:noFill/>
+          </a:ln>
+          <a:effectLst/>
+        </p:spPr>
+        <p:style>
+          <a:lnRef idx="1">
+            <a:schemeClr val="accent1"/>
+          </a:lnRef>
+          <a:fillRef idx="3">
+            <a:schemeClr val="accent1"/>
+          </a:fillRef>
+          <a:effectRef idx="2">
+            <a:schemeClr val="accent1"/>
+          </a:effectRef>
+          <a:fontRef idx="minor">
+            <a:schemeClr val="lt1"/>
+          </a:fontRef>
+        </p:style>
+        <p:txBody>
+          <a:bodyPr rtlCol="0" anchor="ctr"/>
+          <a:lstStyle/>
+          <a:p>
+            <a:pPr algn="ctr"/>
+          </a:p>
+        </p:txBody>
+      </p:sp>
+      <p:sp>
+        <p:nvSpPr>
+          <p:cNvPr id="23" name="Oval 22"/>
+          <p:cNvSpPr/>
+          <p:nvPr/>
+        </p:nvSpPr>
+        <p:spPr>
+          <a:xfrm>
+            <a:off x="7004304" y="1929384"/>
+            <a:ext cx="713232" cy="713232"/>
+          </a:xfrm>
+          <a:prstGeom prst="ellipse">
+            <a:avLst/>
+          </a:prstGeom>
+          <a:solidFill>
+            <a:srgbClr val="FFFFFF"/>
+          </a:solidFill>
+          <a:ln w="22225">
+            <a:solidFill>
+              <a:srgbClr val="008074"/>
+            </a:solidFill>
+          </a:ln>
+          <a:effectLst/>
+        </p:spPr>
+        <p:style>
+          <a:lnRef idx="1">
+            <a:schemeClr val="accent1"/>
+          </a:lnRef>
+          <a:fillRef idx="3">
+            <a:schemeClr val="accent1"/>
+          </a:fillRef>
+          <a:effectRef idx="2">
+            <a:schemeClr val="accent1"/>
+          </a:effectRef>
+          <a:fontRef idx="minor">
+            <a:schemeClr val="lt1"/>
+          </a:fontRef>
+        </p:style>
+        <p:txBody>
+          <a:bodyPr rtlCol="0" anchor="ctr"/>
+          <a:lstStyle/>
+          <a:p>
+            <a:pPr algn="ctr"/>
+          </a:p>
+        </p:txBody>
+      </p:sp>
+      <p:sp>
+        <p:nvSpPr>
+          <p:cNvPr id="24" name="Folded Corner 23"/>
+          <p:cNvSpPr/>
+          <p:nvPr/>
+        </p:nvSpPr>
+        <p:spPr>
+          <a:xfrm>
+            <a:off x="7223760" y="2103120"/>
+            <a:ext cx="274320" cy="365760"/>
+          </a:xfrm>
+          <a:prstGeom prst="foldedCorner">
+            <a:avLst/>
+          </a:prstGeom>
+          <a:solidFill>
+            <a:srgbClr val="FFFFFF"/>
+          </a:solidFill>
+          <a:ln w="19050">
+            <a:solidFill>
+              <a:srgbClr val="008074"/>
+            </a:solidFill>
+          </a:ln>
+          <a:effectLst/>
+        </p:spPr>
+        <p:style>
+          <a:lnRef idx="1">
+            <a:schemeClr val="accent1"/>
+          </a:lnRef>
+          <a:fillRef idx="3">
+            <a:schemeClr val="accent1"/>
+          </a:fillRef>
+          <a:effectRef idx="2">
+            <a:schemeClr val="accent1"/>
+          </a:effectRef>
+          <a:fontRef idx="minor">
+            <a:schemeClr val="lt1"/>
+          </a:fontRef>
+        </p:style>
+        <p:txBody>
+          <a:bodyPr rtlCol="0" anchor="ctr"/>
+          <a:lstStyle/>
+          <a:p>
+            <a:pPr algn="ctr"/>
+          </a:p>
+        </p:txBody>
+      </p:sp>
+      <p:sp>
+        <p:nvSpPr>
+          <p:cNvPr id="25" name="Rectangle 24"/>
+          <p:cNvSpPr/>
+          <p:nvPr/>
+        </p:nvSpPr>
+        <p:spPr>
+          <a:xfrm>
+            <a:off x="7287768" y="2212848"/>
+            <a:ext cx="146304" cy="29260"/>
+          </a:xfrm>
+          <a:prstGeom prst="rect">
+            <a:avLst/>
+          </a:prstGeom>
+          <a:solidFill>
+            <a:srgbClr val="8FADB2"/>
+          </a:solidFill>
+          <a:ln>
+            <a:noFill/>
+          </a:ln>
+          <a:effectLst/>
+        </p:spPr>
+        <p:style>
+          <a:lnRef idx="1">
+            <a:schemeClr val="accent1"/>
+          </a:lnRef>
+          <a:fillRef idx="3">
+            <a:schemeClr val="accent1"/>
+          </a:fillRef>
+          <a:effectRef idx="2">
+            <a:schemeClr val="accent1"/>
+          </a:effectRef>
+          <a:fontRef idx="minor">
+            <a:schemeClr val="lt1"/>
+          </a:fontRef>
+        </p:style>
+        <p:txBody>
+          <a:bodyPr rtlCol="0" anchor="ctr"/>
+          <a:lstStyle/>
+          <a:p>
+            <a:pPr algn="ctr"/>
+          </a:p>
+        </p:txBody>
+      </p:sp>
+      <p:sp>
+        <p:nvSpPr>
+          <p:cNvPr id="26" name="Rectangle 25"/>
+          <p:cNvSpPr/>
+          <p:nvPr/>
+        </p:nvSpPr>
+        <p:spPr>
+          <a:xfrm>
+            <a:off x="7287768" y="2313432"/>
+            <a:ext cx="146304" cy="29260"/>
+          </a:xfrm>
+          <a:prstGeom prst="rect">
+            <a:avLst/>
+          </a:prstGeom>
+          <a:solidFill>
+            <a:srgbClr val="8FADB2"/>
+          </a:solidFill>
+          <a:ln>
+            <a:noFill/>
+          </a:ln>
+          <a:effectLst/>
+        </p:spPr>
+        <p:style>
+          <a:lnRef idx="1">
+            <a:schemeClr val="accent1"/>
+          </a:lnRef>
+          <a:fillRef idx="3">
+            <a:schemeClr val="accent1"/>
+          </a:fillRef>
+          <a:effectRef idx="2">
+            <a:schemeClr val="accent1"/>
+          </a:effectRef>
+          <a:fontRef idx="minor">
+            <a:schemeClr val="lt1"/>
+          </a:fontRef>
+        </p:style>
+        <p:txBody>
+          <a:bodyPr rtlCol="0" anchor="ctr"/>
+          <a:lstStyle/>
+          <a:p>
+            <a:pPr algn="ctr"/>
+          </a:p>
+        </p:txBody>
+      </p:sp>
+      <p:sp>
+        <p:nvSpPr>
+          <p:cNvPr id="27" name="TextBox 26"/>
           <p:cNvSpPr txBox="1"/>
           <p:nvPr/>
         </p:nvSpPr>
         <p:spPr>
           <a:xfrm>
-            <a:off x="4956048" y="1984248"/>
-            <a:ext cx="2697479" cy="320040"/>
+            <a:off x="5001768" y="2011680"/>
+            <a:ext cx="1874519" cy="320040"/>
           </a:xfrm>
           <a:prstGeom prst="rect">
             <a:avLst/>
@@ -27045,14 +29379,14 @@
       </p:sp>
       <p:sp>
         <p:nvSpPr>
-          <p:cNvPr id="12" name="TextBox 11"/>
+          <p:cNvPr id="28" name="TextBox 27"/>
           <p:cNvSpPr txBox="1"/>
           <p:nvPr/>
         </p:nvSpPr>
         <p:spPr>
           <a:xfrm>
-            <a:off x="4956048" y="2331720"/>
-            <a:ext cx="2697479" cy="640080"/>
+            <a:off x="5001768" y="2350008"/>
+            <a:ext cx="1874519" cy="685800"/>
           </a:xfrm>
           <a:prstGeom prst="rect">
             <a:avLst/>
@@ -27084,14 +29418,58 @@
       </p:sp>
       <p:sp>
         <p:nvSpPr>
-          <p:cNvPr id="13" name="TextBox 12"/>
+          <p:cNvPr id="29" name="Oval 28"/>
+          <p:cNvSpPr/>
+          <p:nvPr/>
+        </p:nvSpPr>
+        <p:spPr>
+          <a:xfrm>
+            <a:off x="5020056" y="3209544"/>
+            <a:ext cx="82296" cy="82296"/>
+          </a:xfrm>
+          <a:prstGeom prst="ellipse">
+            <a:avLst/>
+          </a:prstGeom>
+          <a:solidFill>
+            <a:srgbClr val="008074"/>
+          </a:solidFill>
+          <a:ln>
+            <a:noFill/>
+          </a:ln>
+          <a:effectLst/>
+        </p:spPr>
+        <p:style>
+          <a:lnRef idx="1">
+            <a:schemeClr val="accent1"/>
+          </a:lnRef>
+          <a:fillRef idx="3">
+            <a:schemeClr val="accent1"/>
+          </a:fillRef>
+          <a:effectRef idx="2">
+            <a:schemeClr val="accent1"/>
+          </a:effectRef>
+          <a:fontRef idx="minor">
+            <a:schemeClr val="lt1"/>
+          </a:fontRef>
+        </p:style>
+        <p:txBody>
+          <a:bodyPr rtlCol="0" anchor="ctr"/>
+          <a:lstStyle/>
+          <a:p>
+            <a:pPr algn="ctr"/>
+          </a:p>
+        </p:txBody>
+      </p:sp>
+      <p:sp>
+        <p:nvSpPr>
+          <p:cNvPr id="30" name="TextBox 29"/>
           <p:cNvSpPr txBox="1"/>
           <p:nvPr/>
         </p:nvSpPr>
         <p:spPr>
           <a:xfrm>
-            <a:off x="4956048" y="3108960"/>
-            <a:ext cx="2697479" cy="320040"/>
+            <a:off x="5239512" y="3127248"/>
+            <a:ext cx="2423160" cy="320040"/>
           </a:xfrm>
           <a:prstGeom prst="rect">
             <a:avLst/>
@@ -27116,21 +29494,65 @@
                 </a:solidFill>
                 <a:latin typeface="Arial"/>
               </a:rPr>
-              <a:t>•  Tipsheet</a:t>
+              <a:t>Tipsheet</a:t>
             </a:r>
           </a:p>
         </p:txBody>
       </p:sp>
       <p:sp>
         <p:nvSpPr>
-          <p:cNvPr id="14" name="TextBox 13"/>
+          <p:cNvPr id="31" name="Oval 30"/>
+          <p:cNvSpPr/>
+          <p:nvPr/>
+        </p:nvSpPr>
+        <p:spPr>
+          <a:xfrm>
+            <a:off x="5020056" y="3593591"/>
+            <a:ext cx="82296" cy="82296"/>
+          </a:xfrm>
+          <a:prstGeom prst="ellipse">
+            <a:avLst/>
+          </a:prstGeom>
+          <a:solidFill>
+            <a:srgbClr val="008074"/>
+          </a:solidFill>
+          <a:ln>
+            <a:noFill/>
+          </a:ln>
+          <a:effectLst/>
+        </p:spPr>
+        <p:style>
+          <a:lnRef idx="1">
+            <a:schemeClr val="accent1"/>
+          </a:lnRef>
+          <a:fillRef idx="3">
+            <a:schemeClr val="accent1"/>
+          </a:fillRef>
+          <a:effectRef idx="2">
+            <a:schemeClr val="accent1"/>
+          </a:effectRef>
+          <a:fontRef idx="minor">
+            <a:schemeClr val="lt1"/>
+          </a:fontRef>
+        </p:style>
+        <p:txBody>
+          <a:bodyPr rtlCol="0" anchor="ctr"/>
+          <a:lstStyle/>
+          <a:p>
+            <a:pPr algn="ctr"/>
+          </a:p>
+        </p:txBody>
+      </p:sp>
+      <p:sp>
+        <p:nvSpPr>
+          <p:cNvPr id="32" name="TextBox 31"/>
           <p:cNvSpPr txBox="1"/>
           <p:nvPr/>
         </p:nvSpPr>
         <p:spPr>
           <a:xfrm>
-            <a:off x="4956048" y="3493008"/>
-            <a:ext cx="2697479" cy="320040"/>
+            <a:off x="5239512" y="3511296"/>
+            <a:ext cx="2423160" cy="320040"/>
           </a:xfrm>
           <a:prstGeom prst="rect">
             <a:avLst/>
@@ -27155,21 +29577,65 @@
                 </a:solidFill>
                 <a:latin typeface="Arial"/>
               </a:rPr>
-              <a:t>•  Steps for success</a:t>
+              <a:t>Steps for success</a:t>
             </a:r>
           </a:p>
         </p:txBody>
       </p:sp>
       <p:sp>
         <p:nvSpPr>
-          <p:cNvPr id="15" name="TextBox 14"/>
+          <p:cNvPr id="33" name="Oval 32"/>
+          <p:cNvSpPr/>
+          <p:nvPr/>
+        </p:nvSpPr>
+        <p:spPr>
+          <a:xfrm>
+            <a:off x="5020056" y="3977639"/>
+            <a:ext cx="82296" cy="82296"/>
+          </a:xfrm>
+          <a:prstGeom prst="ellipse">
+            <a:avLst/>
+          </a:prstGeom>
+          <a:solidFill>
+            <a:srgbClr val="008074"/>
+          </a:solidFill>
+          <a:ln>
+            <a:noFill/>
+          </a:ln>
+          <a:effectLst/>
+        </p:spPr>
+        <p:style>
+          <a:lnRef idx="1">
+            <a:schemeClr val="accent1"/>
+          </a:lnRef>
+          <a:fillRef idx="3">
+            <a:schemeClr val="accent1"/>
+          </a:fillRef>
+          <a:effectRef idx="2">
+            <a:schemeClr val="accent1"/>
+          </a:effectRef>
+          <a:fontRef idx="minor">
+            <a:schemeClr val="lt1"/>
+          </a:fontRef>
+        </p:style>
+        <p:txBody>
+          <a:bodyPr rtlCol="0" anchor="ctr"/>
+          <a:lstStyle/>
+          <a:p>
+            <a:pPr algn="ctr"/>
+          </a:p>
+        </p:txBody>
+      </p:sp>
+      <p:sp>
+        <p:nvSpPr>
+          <p:cNvPr id="34" name="TextBox 33"/>
           <p:cNvSpPr txBox="1"/>
           <p:nvPr/>
         </p:nvSpPr>
         <p:spPr>
           <a:xfrm>
-            <a:off x="4956048" y="3877056"/>
-            <a:ext cx="2697479" cy="320040"/>
+            <a:off x="5239512" y="3895344"/>
+            <a:ext cx="2423160" cy="320040"/>
           </a:xfrm>
           <a:prstGeom prst="rect">
             <a:avLst/>
@@ -27194,21 +29660,65 @@
                 </a:solidFill>
                 <a:latin typeface="Arial"/>
               </a:rPr>
-              <a:t>•  Talking points</a:t>
+              <a:t>Talking points</a:t>
             </a:r>
           </a:p>
         </p:txBody>
       </p:sp>
       <p:sp>
         <p:nvSpPr>
-          <p:cNvPr id="16" name="TextBox 15"/>
+          <p:cNvPr id="35" name="Oval 34"/>
+          <p:cNvSpPr/>
+          <p:nvPr/>
+        </p:nvSpPr>
+        <p:spPr>
+          <a:xfrm>
+            <a:off x="5020056" y="4361688"/>
+            <a:ext cx="82296" cy="82296"/>
+          </a:xfrm>
+          <a:prstGeom prst="ellipse">
+            <a:avLst/>
+          </a:prstGeom>
+          <a:solidFill>
+            <a:srgbClr val="008074"/>
+          </a:solidFill>
+          <a:ln>
+            <a:noFill/>
+          </a:ln>
+          <a:effectLst/>
+        </p:spPr>
+        <p:style>
+          <a:lnRef idx="1">
+            <a:schemeClr val="accent1"/>
+          </a:lnRef>
+          <a:fillRef idx="3">
+            <a:schemeClr val="accent1"/>
+          </a:fillRef>
+          <a:effectRef idx="2">
+            <a:schemeClr val="accent1"/>
+          </a:effectRef>
+          <a:fontRef idx="minor">
+            <a:schemeClr val="lt1"/>
+          </a:fontRef>
+        </p:style>
+        <p:txBody>
+          <a:bodyPr rtlCol="0" anchor="ctr"/>
+          <a:lstStyle/>
+          <a:p>
+            <a:pPr algn="ctr"/>
+          </a:p>
+        </p:txBody>
+      </p:sp>
+      <p:sp>
+        <p:nvSpPr>
+          <p:cNvPr id="36" name="TextBox 35"/>
           <p:cNvSpPr txBox="1"/>
           <p:nvPr/>
         </p:nvSpPr>
         <p:spPr>
           <a:xfrm>
-            <a:off x="4956048" y="4261104"/>
-            <a:ext cx="2697479" cy="320040"/>
+            <a:off x="5239512" y="4279392"/>
+            <a:ext cx="2423160" cy="320040"/>
           </a:xfrm>
           <a:prstGeom prst="rect">
             <a:avLst/>
@@ -27233,14 +29743,14 @@
                 </a:solidFill>
                 <a:latin typeface="Arial"/>
               </a:rPr>
-              <a:t>•  Client-facing deck</a:t>
+              <a:t>Client-facing deck</a:t>
             </a:r>
           </a:p>
         </p:txBody>
       </p:sp>
       <p:sp>
         <p:nvSpPr>
-          <p:cNvPr id="17" name="Rounded Rectangle 16"/>
+          <p:cNvPr id="37" name="Rounded Rectangle 36"/>
           <p:cNvSpPr/>
           <p:nvPr/>
         </p:nvSpPr>
@@ -27286,14 +29796,458 @@
       </p:sp>
       <p:sp>
         <p:nvSpPr>
-          <p:cNvPr id="18" name="TextBox 17"/>
+          <p:cNvPr id="38" name="Rectangle 37"/>
+          <p:cNvSpPr/>
+          <p:nvPr/>
+        </p:nvSpPr>
+        <p:spPr>
+          <a:xfrm>
+            <a:off x="8494776" y="1783080"/>
+            <a:ext cx="109728" cy="2926080"/>
+          </a:xfrm>
+          <a:prstGeom prst="rect">
+            <a:avLst/>
+          </a:prstGeom>
+          <a:solidFill>
+            <a:srgbClr val="083469"/>
+          </a:solidFill>
+          <a:ln>
+            <a:noFill/>
+          </a:ln>
+          <a:effectLst/>
+        </p:spPr>
+        <p:style>
+          <a:lnRef idx="1">
+            <a:schemeClr val="accent1"/>
+          </a:lnRef>
+          <a:fillRef idx="3">
+            <a:schemeClr val="accent1"/>
+          </a:fillRef>
+          <a:effectRef idx="2">
+            <a:schemeClr val="accent1"/>
+          </a:effectRef>
+          <a:fontRef idx="minor">
+            <a:schemeClr val="lt1"/>
+          </a:fontRef>
+        </p:style>
+        <p:txBody>
+          <a:bodyPr rtlCol="0" anchor="ctr"/>
+          <a:lstStyle/>
+          <a:p>
+            <a:pPr algn="ctr"/>
+          </a:p>
+        </p:txBody>
+      </p:sp>
+      <p:sp>
+        <p:nvSpPr>
+          <p:cNvPr id="39" name="Oval 38"/>
+          <p:cNvSpPr/>
+          <p:nvPr/>
+        </p:nvSpPr>
+        <p:spPr>
+          <a:xfrm>
+            <a:off x="10817352" y="1929384"/>
+            <a:ext cx="713232" cy="713232"/>
+          </a:xfrm>
+          <a:prstGeom prst="ellipse">
+            <a:avLst/>
+          </a:prstGeom>
+          <a:solidFill>
+            <a:srgbClr val="FFFFFF"/>
+          </a:solidFill>
+          <a:ln w="22225">
+            <a:solidFill>
+              <a:srgbClr val="008074"/>
+            </a:solidFill>
+          </a:ln>
+          <a:effectLst/>
+        </p:spPr>
+        <p:style>
+          <a:lnRef idx="1">
+            <a:schemeClr val="accent1"/>
+          </a:lnRef>
+          <a:fillRef idx="3">
+            <a:schemeClr val="accent1"/>
+          </a:fillRef>
+          <a:effectRef idx="2">
+            <a:schemeClr val="accent1"/>
+          </a:effectRef>
+          <a:fontRef idx="minor">
+            <a:schemeClr val="lt1"/>
+          </a:fontRef>
+        </p:style>
+        <p:txBody>
+          <a:bodyPr rtlCol="0" anchor="ctr"/>
+          <a:lstStyle/>
+          <a:p>
+            <a:pPr algn="ctr"/>
+          </a:p>
+        </p:txBody>
+      </p:sp>
+      <p:sp>
+        <p:nvSpPr>
+          <p:cNvPr id="40" name="Rectangle 39"/>
+          <p:cNvSpPr/>
+          <p:nvPr/>
+        </p:nvSpPr>
+        <p:spPr>
+          <a:xfrm>
+            <a:off x="11000232" y="2130552"/>
+            <a:ext cx="347472" cy="310896"/>
+          </a:xfrm>
+          <a:prstGeom prst="rect">
+            <a:avLst/>
+          </a:prstGeom>
+          <a:solidFill>
+            <a:srgbClr val="FFFFFF"/>
+          </a:solidFill>
+          <a:ln w="19050">
+            <a:solidFill>
+              <a:srgbClr val="008074"/>
+            </a:solidFill>
+          </a:ln>
+          <a:effectLst/>
+        </p:spPr>
+        <p:style>
+          <a:lnRef idx="1">
+            <a:schemeClr val="accent1"/>
+          </a:lnRef>
+          <a:fillRef idx="3">
+            <a:schemeClr val="accent1"/>
+          </a:fillRef>
+          <a:effectRef idx="2">
+            <a:schemeClr val="accent1"/>
+          </a:effectRef>
+          <a:fontRef idx="minor">
+            <a:schemeClr val="lt1"/>
+          </a:fontRef>
+        </p:style>
+        <p:txBody>
+          <a:bodyPr rtlCol="0" anchor="ctr"/>
+          <a:lstStyle/>
+          <a:p>
+            <a:pPr algn="ctr"/>
+          </a:p>
+        </p:txBody>
+      </p:sp>
+      <p:sp>
+        <p:nvSpPr>
+          <p:cNvPr id="41" name="Rectangle 40"/>
+          <p:cNvSpPr/>
+          <p:nvPr/>
+        </p:nvSpPr>
+        <p:spPr>
+          <a:xfrm>
+            <a:off x="11000232" y="2130552"/>
+            <a:ext cx="347472" cy="91440"/>
+          </a:xfrm>
+          <a:prstGeom prst="rect">
+            <a:avLst/>
+          </a:prstGeom>
+          <a:solidFill>
+            <a:srgbClr val="008074"/>
+          </a:solidFill>
+          <a:ln>
+            <a:noFill/>
+          </a:ln>
+          <a:effectLst/>
+        </p:spPr>
+        <p:style>
+          <a:lnRef idx="1">
+            <a:schemeClr val="accent1"/>
+          </a:lnRef>
+          <a:fillRef idx="3">
+            <a:schemeClr val="accent1"/>
+          </a:fillRef>
+          <a:effectRef idx="2">
+            <a:schemeClr val="accent1"/>
+          </a:effectRef>
+          <a:fontRef idx="minor">
+            <a:schemeClr val="lt1"/>
+          </a:fontRef>
+        </p:style>
+        <p:txBody>
+          <a:bodyPr rtlCol="0" anchor="ctr"/>
+          <a:lstStyle/>
+          <a:p>
+            <a:pPr algn="ctr"/>
+          </a:p>
+        </p:txBody>
+      </p:sp>
+      <p:sp>
+        <p:nvSpPr>
+          <p:cNvPr id="42" name="Oval 41"/>
+          <p:cNvSpPr/>
+          <p:nvPr/>
+        </p:nvSpPr>
+        <p:spPr>
+          <a:xfrm>
+            <a:off x="11055096" y="2267712"/>
+            <a:ext cx="45720" cy="45720"/>
+          </a:xfrm>
+          <a:prstGeom prst="ellipse">
+            <a:avLst/>
+          </a:prstGeom>
+          <a:solidFill>
+            <a:srgbClr val="8FADB2"/>
+          </a:solidFill>
+          <a:ln>
+            <a:noFill/>
+          </a:ln>
+          <a:effectLst/>
+        </p:spPr>
+        <p:style>
+          <a:lnRef idx="1">
+            <a:schemeClr val="accent1"/>
+          </a:lnRef>
+          <a:fillRef idx="3">
+            <a:schemeClr val="accent1"/>
+          </a:fillRef>
+          <a:effectRef idx="2">
+            <a:schemeClr val="accent1"/>
+          </a:effectRef>
+          <a:fontRef idx="minor">
+            <a:schemeClr val="lt1"/>
+          </a:fontRef>
+        </p:style>
+        <p:txBody>
+          <a:bodyPr rtlCol="0" anchor="ctr"/>
+          <a:lstStyle/>
+          <a:p>
+            <a:pPr algn="ctr"/>
+          </a:p>
+        </p:txBody>
+      </p:sp>
+      <p:sp>
+        <p:nvSpPr>
+          <p:cNvPr id="43" name="Oval 42"/>
+          <p:cNvSpPr/>
+          <p:nvPr/>
+        </p:nvSpPr>
+        <p:spPr>
+          <a:xfrm>
+            <a:off x="11155680" y="2267712"/>
+            <a:ext cx="45720" cy="45720"/>
+          </a:xfrm>
+          <a:prstGeom prst="ellipse">
+            <a:avLst/>
+          </a:prstGeom>
+          <a:solidFill>
+            <a:srgbClr val="8FADB2"/>
+          </a:solidFill>
+          <a:ln>
+            <a:noFill/>
+          </a:ln>
+          <a:effectLst/>
+        </p:spPr>
+        <p:style>
+          <a:lnRef idx="1">
+            <a:schemeClr val="accent1"/>
+          </a:lnRef>
+          <a:fillRef idx="3">
+            <a:schemeClr val="accent1"/>
+          </a:fillRef>
+          <a:effectRef idx="2">
+            <a:schemeClr val="accent1"/>
+          </a:effectRef>
+          <a:fontRef idx="minor">
+            <a:schemeClr val="lt1"/>
+          </a:fontRef>
+        </p:style>
+        <p:txBody>
+          <a:bodyPr rtlCol="0" anchor="ctr"/>
+          <a:lstStyle/>
+          <a:p>
+            <a:pPr algn="ctr"/>
+          </a:p>
+        </p:txBody>
+      </p:sp>
+      <p:sp>
+        <p:nvSpPr>
+          <p:cNvPr id="44" name="Oval 43"/>
+          <p:cNvSpPr/>
+          <p:nvPr/>
+        </p:nvSpPr>
+        <p:spPr>
+          <a:xfrm>
+            <a:off x="11256264" y="2267712"/>
+            <a:ext cx="45720" cy="45720"/>
+          </a:xfrm>
+          <a:prstGeom prst="ellipse">
+            <a:avLst/>
+          </a:prstGeom>
+          <a:solidFill>
+            <a:srgbClr val="8FADB2"/>
+          </a:solidFill>
+          <a:ln>
+            <a:noFill/>
+          </a:ln>
+          <a:effectLst/>
+        </p:spPr>
+        <p:style>
+          <a:lnRef idx="1">
+            <a:schemeClr val="accent1"/>
+          </a:lnRef>
+          <a:fillRef idx="3">
+            <a:schemeClr val="accent1"/>
+          </a:fillRef>
+          <a:effectRef idx="2">
+            <a:schemeClr val="accent1"/>
+          </a:effectRef>
+          <a:fontRef idx="minor">
+            <a:schemeClr val="lt1"/>
+          </a:fontRef>
+        </p:style>
+        <p:txBody>
+          <a:bodyPr rtlCol="0" anchor="ctr"/>
+          <a:lstStyle/>
+          <a:p>
+            <a:pPr algn="ctr"/>
+          </a:p>
+        </p:txBody>
+      </p:sp>
+      <p:sp>
+        <p:nvSpPr>
+          <p:cNvPr id="45" name="Oval 44"/>
+          <p:cNvSpPr/>
+          <p:nvPr/>
+        </p:nvSpPr>
+        <p:spPr>
+          <a:xfrm>
+            <a:off x="11055096" y="2359152"/>
+            <a:ext cx="45720" cy="45720"/>
+          </a:xfrm>
+          <a:prstGeom prst="ellipse">
+            <a:avLst/>
+          </a:prstGeom>
+          <a:solidFill>
+            <a:srgbClr val="8FADB2"/>
+          </a:solidFill>
+          <a:ln>
+            <a:noFill/>
+          </a:ln>
+          <a:effectLst/>
+        </p:spPr>
+        <p:style>
+          <a:lnRef idx="1">
+            <a:schemeClr val="accent1"/>
+          </a:lnRef>
+          <a:fillRef idx="3">
+            <a:schemeClr val="accent1"/>
+          </a:fillRef>
+          <a:effectRef idx="2">
+            <a:schemeClr val="accent1"/>
+          </a:effectRef>
+          <a:fontRef idx="minor">
+            <a:schemeClr val="lt1"/>
+          </a:fontRef>
+        </p:style>
+        <p:txBody>
+          <a:bodyPr rtlCol="0" anchor="ctr"/>
+          <a:lstStyle/>
+          <a:p>
+            <a:pPr algn="ctr"/>
+          </a:p>
+        </p:txBody>
+      </p:sp>
+      <p:sp>
+        <p:nvSpPr>
+          <p:cNvPr id="46" name="Oval 45"/>
+          <p:cNvSpPr/>
+          <p:nvPr/>
+        </p:nvSpPr>
+        <p:spPr>
+          <a:xfrm>
+            <a:off x="11155680" y="2359152"/>
+            <a:ext cx="45720" cy="45720"/>
+          </a:xfrm>
+          <a:prstGeom prst="ellipse">
+            <a:avLst/>
+          </a:prstGeom>
+          <a:solidFill>
+            <a:srgbClr val="8FADB2"/>
+          </a:solidFill>
+          <a:ln>
+            <a:noFill/>
+          </a:ln>
+          <a:effectLst/>
+        </p:spPr>
+        <p:style>
+          <a:lnRef idx="1">
+            <a:schemeClr val="accent1"/>
+          </a:lnRef>
+          <a:fillRef idx="3">
+            <a:schemeClr val="accent1"/>
+          </a:fillRef>
+          <a:effectRef idx="2">
+            <a:schemeClr val="accent1"/>
+          </a:effectRef>
+          <a:fontRef idx="minor">
+            <a:schemeClr val="lt1"/>
+          </a:fontRef>
+        </p:style>
+        <p:txBody>
+          <a:bodyPr rtlCol="0" anchor="ctr"/>
+          <a:lstStyle/>
+          <a:p>
+            <a:pPr algn="ctr"/>
+          </a:p>
+        </p:txBody>
+      </p:sp>
+      <p:sp>
+        <p:nvSpPr>
+          <p:cNvPr id="47" name="Oval 46"/>
+          <p:cNvSpPr/>
+          <p:nvPr/>
+        </p:nvSpPr>
+        <p:spPr>
+          <a:xfrm>
+            <a:off x="11256264" y="2359152"/>
+            <a:ext cx="45720" cy="45720"/>
+          </a:xfrm>
+          <a:prstGeom prst="ellipse">
+            <a:avLst/>
+          </a:prstGeom>
+          <a:solidFill>
+            <a:srgbClr val="8FADB2"/>
+          </a:solidFill>
+          <a:ln>
+            <a:noFill/>
+          </a:ln>
+          <a:effectLst/>
+        </p:spPr>
+        <p:style>
+          <a:lnRef idx="1">
+            <a:schemeClr val="accent1"/>
+          </a:lnRef>
+          <a:fillRef idx="3">
+            <a:schemeClr val="accent1"/>
+          </a:fillRef>
+          <a:effectRef idx="2">
+            <a:schemeClr val="accent1"/>
+          </a:effectRef>
+          <a:fontRef idx="minor">
+            <a:schemeClr val="lt1"/>
+          </a:fontRef>
+        </p:style>
+        <p:txBody>
+          <a:bodyPr rtlCol="0" anchor="ctr"/>
+          <a:lstStyle/>
+          <a:p>
+            <a:pPr algn="ctr"/>
+          </a:p>
+        </p:txBody>
+      </p:sp>
+      <p:sp>
+        <p:nvSpPr>
+          <p:cNvPr id="48" name="TextBox 47"/>
           <p:cNvSpPr txBox="1"/>
           <p:nvPr/>
         </p:nvSpPr>
         <p:spPr>
           <a:xfrm>
-            <a:off x="8769096" y="1984248"/>
-            <a:ext cx="2697479" cy="320040"/>
+            <a:off x="8814815" y="2011680"/>
+            <a:ext cx="1874519" cy="320040"/>
           </a:xfrm>
           <a:prstGeom prst="rect">
             <a:avLst/>
@@ -27325,14 +30279,14 @@
       </p:sp>
       <p:sp>
         <p:nvSpPr>
-          <p:cNvPr id="19" name="TextBox 18"/>
+          <p:cNvPr id="49" name="TextBox 48"/>
           <p:cNvSpPr txBox="1"/>
           <p:nvPr/>
         </p:nvSpPr>
         <p:spPr>
           <a:xfrm>
-            <a:off x="8769096" y="2331720"/>
-            <a:ext cx="2697479" cy="640080"/>
+            <a:off x="8814815" y="2350008"/>
+            <a:ext cx="1874519" cy="685800"/>
           </a:xfrm>
           <a:prstGeom prst="rect">
             <a:avLst/>
@@ -27364,14 +30318,58 @@
       </p:sp>
       <p:sp>
         <p:nvSpPr>
-          <p:cNvPr id="20" name="TextBox 19"/>
+          <p:cNvPr id="50" name="Oval 49"/>
+          <p:cNvSpPr/>
+          <p:nvPr/>
+        </p:nvSpPr>
+        <p:spPr>
+          <a:xfrm>
+            <a:off x="8833103" y="3209544"/>
+            <a:ext cx="82296" cy="82296"/>
+          </a:xfrm>
+          <a:prstGeom prst="ellipse">
+            <a:avLst/>
+          </a:prstGeom>
+          <a:solidFill>
+            <a:srgbClr val="008074"/>
+          </a:solidFill>
+          <a:ln>
+            <a:noFill/>
+          </a:ln>
+          <a:effectLst/>
+        </p:spPr>
+        <p:style>
+          <a:lnRef idx="1">
+            <a:schemeClr val="accent1"/>
+          </a:lnRef>
+          <a:fillRef idx="3">
+            <a:schemeClr val="accent1"/>
+          </a:fillRef>
+          <a:effectRef idx="2">
+            <a:schemeClr val="accent1"/>
+          </a:effectRef>
+          <a:fontRef idx="minor">
+            <a:schemeClr val="lt1"/>
+          </a:fontRef>
+        </p:style>
+        <p:txBody>
+          <a:bodyPr rtlCol="0" anchor="ctr"/>
+          <a:lstStyle/>
+          <a:p>
+            <a:pPr algn="ctr"/>
+          </a:p>
+        </p:txBody>
+      </p:sp>
+      <p:sp>
+        <p:nvSpPr>
+          <p:cNvPr id="51" name="TextBox 50"/>
           <p:cNvSpPr txBox="1"/>
           <p:nvPr/>
         </p:nvSpPr>
         <p:spPr>
           <a:xfrm>
-            <a:off x="8769096" y="3108960"/>
-            <a:ext cx="2697479" cy="320040"/>
+            <a:off x="9052559" y="3127248"/>
+            <a:ext cx="2423160" cy="320040"/>
           </a:xfrm>
           <a:prstGeom prst="rect">
             <a:avLst/>
@@ -27396,21 +30394,65 @@
                 </a:solidFill>
                 <a:latin typeface="Arial"/>
               </a:rPr>
-              <a:t>•  Post-workshop survey</a:t>
+              <a:t>Post-workshop survey</a:t>
             </a:r>
           </a:p>
         </p:txBody>
       </p:sp>
       <p:sp>
         <p:nvSpPr>
-          <p:cNvPr id="21" name="TextBox 20"/>
+          <p:cNvPr id="52" name="Oval 51"/>
+          <p:cNvSpPr/>
+          <p:nvPr/>
+        </p:nvSpPr>
+        <p:spPr>
+          <a:xfrm>
+            <a:off x="8833103" y="3593591"/>
+            <a:ext cx="82296" cy="82296"/>
+          </a:xfrm>
+          <a:prstGeom prst="ellipse">
+            <a:avLst/>
+          </a:prstGeom>
+          <a:solidFill>
+            <a:srgbClr val="008074"/>
+          </a:solidFill>
+          <a:ln>
+            <a:noFill/>
+          </a:ln>
+          <a:effectLst/>
+        </p:spPr>
+        <p:style>
+          <a:lnRef idx="1">
+            <a:schemeClr val="accent1"/>
+          </a:lnRef>
+          <a:fillRef idx="3">
+            <a:schemeClr val="accent1"/>
+          </a:fillRef>
+          <a:effectRef idx="2">
+            <a:schemeClr val="accent1"/>
+          </a:effectRef>
+          <a:fontRef idx="minor">
+            <a:schemeClr val="lt1"/>
+          </a:fontRef>
+        </p:style>
+        <p:txBody>
+          <a:bodyPr rtlCol="0" anchor="ctr"/>
+          <a:lstStyle/>
+          <a:p>
+            <a:pPr algn="ctr"/>
+          </a:p>
+        </p:txBody>
+      </p:sp>
+      <p:sp>
+        <p:nvSpPr>
+          <p:cNvPr id="53" name="TextBox 52"/>
           <p:cNvSpPr txBox="1"/>
           <p:nvPr/>
         </p:nvSpPr>
         <p:spPr>
           <a:xfrm>
-            <a:off x="8769096" y="3493008"/>
-            <a:ext cx="2697479" cy="320040"/>
+            <a:off x="9052559" y="3511296"/>
+            <a:ext cx="2423160" cy="320040"/>
           </a:xfrm>
           <a:prstGeom prst="rect">
             <a:avLst/>
@@ -27435,14 +30477,14 @@
                 </a:solidFill>
                 <a:latin typeface="Arial"/>
               </a:rPr>
-              <a:t>•  Engagement calendar</a:t>
+              <a:t>Engagement calendar</a:t>
             </a:r>
           </a:p>
         </p:txBody>
       </p:sp>
       <p:sp>
         <p:nvSpPr>
-          <p:cNvPr id="22" name="Rounded Rectangle 21"/>
+          <p:cNvPr id="54" name="Rounded Rectangle 53"/>
           <p:cNvSpPr/>
           <p:nvPr/>
         </p:nvSpPr>
@@ -27488,58 +30530,14 @@
       </p:sp>
       <p:sp>
         <p:nvSpPr>
-          <p:cNvPr id="23" name="Right Arrow 22"/>
-          <p:cNvSpPr/>
-          <p:nvPr/>
-        </p:nvSpPr>
-        <p:spPr>
-          <a:xfrm>
-            <a:off x="10963656" y="5248656"/>
-            <a:ext cx="384048" cy="329184"/>
-          </a:xfrm>
-          <a:prstGeom prst="rightArrow">
-            <a:avLst/>
-          </a:prstGeom>
-          <a:solidFill>
-            <a:srgbClr val="D0EAE9"/>
-          </a:solidFill>
-          <a:ln>
-            <a:noFill/>
-          </a:ln>
-          <a:effectLst/>
-        </p:spPr>
-        <p:style>
-          <a:lnRef idx="1">
-            <a:schemeClr val="accent1"/>
-          </a:lnRef>
-          <a:fillRef idx="3">
-            <a:schemeClr val="accent1"/>
-          </a:fillRef>
-          <a:effectRef idx="2">
-            <a:schemeClr val="accent1"/>
-          </a:effectRef>
-          <a:fontRef idx="minor">
-            <a:schemeClr val="lt1"/>
-          </a:fontRef>
-        </p:style>
-        <p:txBody>
-          <a:bodyPr rtlCol="0" anchor="ctr"/>
-          <a:lstStyle/>
-          <a:p>
-            <a:pPr algn="ctr"/>
-          </a:p>
-        </p:txBody>
-      </p:sp>
-      <p:sp>
-        <p:nvSpPr>
-          <p:cNvPr id="24" name="TextBox 23"/>
+          <p:cNvPr id="55" name="TextBox 54"/>
           <p:cNvSpPr txBox="1"/>
           <p:nvPr/>
         </p:nvSpPr>
         <p:spPr>
           <a:xfrm>
             <a:off x="5001768" y="5175504"/>
-            <a:ext cx="5733288" cy="502920"/>
+            <a:ext cx="4864608" cy="502920"/>
           </a:xfrm>
           <a:prstGeom prst="rect">
             <a:avLst/>
@@ -27582,6 +30580,254 @@
               </a:rPr>
               <a:t>sends the toolkit out across regular touchpoints</a:t>
             </a:r>
+          </a:p>
+        </p:txBody>
+      </p:sp>
+      <p:sp>
+        <p:nvSpPr>
+          <p:cNvPr id="56" name="Oval 55"/>
+          <p:cNvSpPr/>
+          <p:nvPr/>
+        </p:nvSpPr>
+        <p:spPr>
+          <a:xfrm>
+            <a:off x="9957816" y="5340096"/>
+            <a:ext cx="155448" cy="155448"/>
+          </a:xfrm>
+          <a:prstGeom prst="ellipse">
+            <a:avLst/>
+          </a:prstGeom>
+          <a:solidFill>
+            <a:srgbClr val="00D190"/>
+          </a:solidFill>
+          <a:ln>
+            <a:noFill/>
+          </a:ln>
+          <a:effectLst/>
+        </p:spPr>
+        <p:style>
+          <a:lnRef idx="1">
+            <a:schemeClr val="accent1"/>
+          </a:lnRef>
+          <a:fillRef idx="3">
+            <a:schemeClr val="accent1"/>
+          </a:fillRef>
+          <a:effectRef idx="2">
+            <a:schemeClr val="accent1"/>
+          </a:effectRef>
+          <a:fontRef idx="minor">
+            <a:schemeClr val="lt1"/>
+          </a:fontRef>
+        </p:style>
+        <p:txBody>
+          <a:bodyPr rtlCol="0" anchor="ctr"/>
+          <a:lstStyle/>
+          <a:p>
+            <a:pPr algn="ctr"/>
+          </a:p>
+        </p:txBody>
+      </p:sp>
+      <p:cxnSp>
+        <p:nvCxnSpPr>
+          <p:cNvPr id="57" name="Connector 56"/>
+          <p:cNvCxnSpPr/>
+          <p:nvPr/>
+        </p:nvCxnSpPr>
+        <p:spPr>
+          <a:xfrm>
+            <a:off x="10113264" y="5417820"/>
+            <a:ext cx="228600" cy="0"/>
+          </a:xfrm>
+          <a:prstGeom prst="line">
+            <a:avLst/>
+          </a:prstGeom>
+          <a:ln w="19050">
+            <a:solidFill>
+              <a:srgbClr val="D0EAE9"/>
+            </a:solidFill>
+          </a:ln>
+          <a:effectLst/>
+        </p:spPr>
+        <p:style>
+          <a:lnRef idx="2">
+            <a:schemeClr val="accent1"/>
+          </a:lnRef>
+          <a:fillRef idx="0">
+            <a:schemeClr val="accent1"/>
+          </a:fillRef>
+          <a:effectRef idx="1">
+            <a:schemeClr val="accent1"/>
+          </a:effectRef>
+          <a:fontRef idx="minor">
+            <a:schemeClr val="tx1"/>
+          </a:fontRef>
+        </p:style>
+      </p:cxnSp>
+      <p:sp>
+        <p:nvSpPr>
+          <p:cNvPr id="58" name="Oval 57"/>
+          <p:cNvSpPr/>
+          <p:nvPr/>
+        </p:nvSpPr>
+        <p:spPr>
+          <a:xfrm>
+            <a:off x="10341864" y="5340096"/>
+            <a:ext cx="155448" cy="155448"/>
+          </a:xfrm>
+          <a:prstGeom prst="ellipse">
+            <a:avLst/>
+          </a:prstGeom>
+          <a:solidFill>
+            <a:srgbClr val="00D190"/>
+          </a:solidFill>
+          <a:ln>
+            <a:noFill/>
+          </a:ln>
+          <a:effectLst/>
+        </p:spPr>
+        <p:style>
+          <a:lnRef idx="1">
+            <a:schemeClr val="accent1"/>
+          </a:lnRef>
+          <a:fillRef idx="3">
+            <a:schemeClr val="accent1"/>
+          </a:fillRef>
+          <a:effectRef idx="2">
+            <a:schemeClr val="accent1"/>
+          </a:effectRef>
+          <a:fontRef idx="minor">
+            <a:schemeClr val="lt1"/>
+          </a:fontRef>
+        </p:style>
+        <p:txBody>
+          <a:bodyPr rtlCol="0" anchor="ctr"/>
+          <a:lstStyle/>
+          <a:p>
+            <a:pPr algn="ctr"/>
+          </a:p>
+        </p:txBody>
+      </p:sp>
+      <p:cxnSp>
+        <p:nvCxnSpPr>
+          <p:cNvPr id="59" name="Connector 58"/>
+          <p:cNvCxnSpPr/>
+          <p:nvPr/>
+        </p:nvCxnSpPr>
+        <p:spPr>
+          <a:xfrm>
+            <a:off x="10497312" y="5417820"/>
+            <a:ext cx="228600" cy="0"/>
+          </a:xfrm>
+          <a:prstGeom prst="line">
+            <a:avLst/>
+          </a:prstGeom>
+          <a:ln w="19050">
+            <a:solidFill>
+              <a:srgbClr val="D0EAE9"/>
+            </a:solidFill>
+          </a:ln>
+          <a:effectLst/>
+        </p:spPr>
+        <p:style>
+          <a:lnRef idx="2">
+            <a:schemeClr val="accent1"/>
+          </a:lnRef>
+          <a:fillRef idx="0">
+            <a:schemeClr val="accent1"/>
+          </a:fillRef>
+          <a:effectRef idx="1">
+            <a:schemeClr val="accent1"/>
+          </a:effectRef>
+          <a:fontRef idx="minor">
+            <a:schemeClr val="tx1"/>
+          </a:fontRef>
+        </p:style>
+      </p:cxnSp>
+      <p:sp>
+        <p:nvSpPr>
+          <p:cNvPr id="60" name="Oval 59"/>
+          <p:cNvSpPr/>
+          <p:nvPr/>
+        </p:nvSpPr>
+        <p:spPr>
+          <a:xfrm>
+            <a:off x="10725912" y="5340096"/>
+            <a:ext cx="155448" cy="155448"/>
+          </a:xfrm>
+          <a:prstGeom prst="ellipse">
+            <a:avLst/>
+          </a:prstGeom>
+          <a:solidFill>
+            <a:srgbClr val="00D190"/>
+          </a:solidFill>
+          <a:ln>
+            <a:noFill/>
+          </a:ln>
+          <a:effectLst/>
+        </p:spPr>
+        <p:style>
+          <a:lnRef idx="1">
+            <a:schemeClr val="accent1"/>
+          </a:lnRef>
+          <a:fillRef idx="3">
+            <a:schemeClr val="accent1"/>
+          </a:fillRef>
+          <a:effectRef idx="2">
+            <a:schemeClr val="accent1"/>
+          </a:effectRef>
+          <a:fontRef idx="minor">
+            <a:schemeClr val="lt1"/>
+          </a:fontRef>
+        </p:style>
+        <p:txBody>
+          <a:bodyPr rtlCol="0" anchor="ctr"/>
+          <a:lstStyle/>
+          <a:p>
+            <a:pPr algn="ctr"/>
+          </a:p>
+        </p:txBody>
+      </p:sp>
+      <p:sp>
+        <p:nvSpPr>
+          <p:cNvPr id="61" name="Right Arrow 60"/>
+          <p:cNvSpPr/>
+          <p:nvPr/>
+        </p:nvSpPr>
+        <p:spPr>
+          <a:xfrm>
+            <a:off x="11119104" y="5276088"/>
+            <a:ext cx="329184" cy="292608"/>
+          </a:xfrm>
+          <a:prstGeom prst="rightArrow">
+            <a:avLst/>
+          </a:prstGeom>
+          <a:solidFill>
+            <a:srgbClr val="00D190"/>
+          </a:solidFill>
+          <a:ln>
+            <a:noFill/>
+          </a:ln>
+          <a:effectLst/>
+        </p:spPr>
+        <p:style>
+          <a:lnRef idx="1">
+            <a:schemeClr val="accent1"/>
+          </a:lnRef>
+          <a:fillRef idx="3">
+            <a:schemeClr val="accent1"/>
+          </a:fillRef>
+          <a:effectRef idx="2">
+            <a:schemeClr val="accent1"/>
+          </a:effectRef>
+          <a:fontRef idx="minor">
+            <a:schemeClr val="lt1"/>
+          </a:fontRef>
+        </p:style>
+        <p:txBody>
+          <a:bodyPr rtlCol="0" anchor="ctr"/>
+          <a:lstStyle/>
+          <a:p>
+            <a:pPr algn="ctr"/>
           </a:p>
         </p:txBody>
       </p:sp>
@@ -27619,6 +30865,11 @@
           <a:lstStyle/>
           <a:p>
             <a:r>
+              <a:rPr>
+                <a:solidFill>
+                  <a:srgbClr val="FFFFFF"/>
+                </a:solidFill>
+              </a:rPr>
               <a:t>Now, the flow in action.</a:t>
             </a:r>
           </a:p>
@@ -27640,6 +30891,11 @@
           <a:lstStyle/>
           <a:p>
             <a:r>
+              <a:rPr>
+                <a:solidFill>
+                  <a:srgbClr val="D0EAE9"/>
+                </a:solidFill>
+              </a:rPr>
               <a:t>LIVE DEMO</a:t>
             </a:r>
           </a:p>
@@ -27647,13 +30903,184 @@
       </p:sp>
       <p:sp>
         <p:nvSpPr>
-          <p:cNvPr id="6" name="Rounded Rectangle 5"/>
+          <p:cNvPr id="6" name="Rectangle 5"/>
           <p:cNvSpPr/>
           <p:nvPr/>
         </p:nvSpPr>
         <p:spPr>
           <a:xfrm>
-            <a:off x="868680" y="2743200"/>
+            <a:off x="10744200" y="-1188720"/>
+            <a:ext cx="2286000" cy="2286000"/>
+          </a:xfrm>
+          <a:prstGeom prst="rect">
+            <a:avLst/>
+          </a:prstGeom>
+          <a:noFill/>
+          <a:ln w="31750">
+            <a:solidFill>
+              <a:srgbClr val="1E4A7E"/>
+            </a:solidFill>
+          </a:ln>
+          <a:effectLst/>
+        </p:spPr>
+        <p:style>
+          <a:lnRef idx="1">
+            <a:schemeClr val="accent1"/>
+          </a:lnRef>
+          <a:fillRef idx="3">
+            <a:schemeClr val="accent1"/>
+          </a:fillRef>
+          <a:effectRef idx="2">
+            <a:schemeClr val="accent1"/>
+          </a:effectRef>
+          <a:fontRef idx="minor">
+            <a:schemeClr val="lt1"/>
+          </a:fontRef>
+        </p:style>
+        <p:txBody>
+          <a:bodyPr rtlCol="0" anchor="ctr"/>
+          <a:lstStyle/>
+          <a:p>
+            <a:pPr algn="ctr"/>
+          </a:p>
+        </p:txBody>
+      </p:sp>
+      <p:sp>
+        <p:nvSpPr>
+          <p:cNvPr id="7" name="Rectangle 6"/>
+          <p:cNvSpPr/>
+          <p:nvPr/>
+        </p:nvSpPr>
+        <p:spPr>
+          <a:xfrm>
+            <a:off x="11384280" y="-548640"/>
+            <a:ext cx="2103120" cy="2103120"/>
+          </a:xfrm>
+          <a:prstGeom prst="rect">
+            <a:avLst/>
+          </a:prstGeom>
+          <a:noFill/>
+          <a:ln w="31750">
+            <a:solidFill>
+              <a:srgbClr val="1E4A7E"/>
+            </a:solidFill>
+          </a:ln>
+          <a:effectLst/>
+        </p:spPr>
+        <p:style>
+          <a:lnRef idx="1">
+            <a:schemeClr val="accent1"/>
+          </a:lnRef>
+          <a:fillRef idx="3">
+            <a:schemeClr val="accent1"/>
+          </a:fillRef>
+          <a:effectRef idx="2">
+            <a:schemeClr val="accent1"/>
+          </a:effectRef>
+          <a:fontRef idx="minor">
+            <a:schemeClr val="lt1"/>
+          </a:fontRef>
+        </p:style>
+        <p:txBody>
+          <a:bodyPr rtlCol="0" anchor="ctr"/>
+          <a:lstStyle/>
+          <a:p>
+            <a:pPr algn="ctr"/>
+          </a:p>
+        </p:txBody>
+      </p:sp>
+      <p:sp>
+        <p:nvSpPr>
+          <p:cNvPr id="8" name="Oval 7"/>
+          <p:cNvSpPr/>
+          <p:nvPr/>
+        </p:nvSpPr>
+        <p:spPr>
+          <a:xfrm>
+            <a:off x="2011680" y="2103120"/>
+            <a:ext cx="548640" cy="548640"/>
+          </a:xfrm>
+          <a:prstGeom prst="ellipse">
+            <a:avLst/>
+          </a:prstGeom>
+          <a:solidFill>
+            <a:srgbClr val="00D190"/>
+          </a:solidFill>
+          <a:ln>
+            <a:noFill/>
+          </a:ln>
+          <a:effectLst/>
+        </p:spPr>
+        <p:style>
+          <a:lnRef idx="1">
+            <a:schemeClr val="accent1"/>
+          </a:lnRef>
+          <a:fillRef idx="3">
+            <a:schemeClr val="accent1"/>
+          </a:fillRef>
+          <a:effectRef idx="2">
+            <a:schemeClr val="accent1"/>
+          </a:effectRef>
+          <a:fontRef idx="minor">
+            <a:schemeClr val="lt1"/>
+          </a:fontRef>
+        </p:style>
+        <p:txBody>
+          <a:bodyPr rtlCol="0" anchor="ctr"/>
+          <a:lstStyle/>
+          <a:p>
+            <a:pPr algn="ctr"/>
+          </a:p>
+        </p:txBody>
+      </p:sp>
+      <p:sp>
+        <p:nvSpPr>
+          <p:cNvPr id="9" name="TextBox 8"/>
+          <p:cNvSpPr txBox="1"/>
+          <p:nvPr/>
+        </p:nvSpPr>
+        <p:spPr>
+          <a:xfrm>
+            <a:off x="2011680" y="2212848"/>
+            <a:ext cx="548640" cy="365760"/>
+          </a:xfrm>
+          <a:prstGeom prst="rect">
+            <a:avLst/>
+          </a:prstGeom>
+          <a:noFill/>
+        </p:spPr>
+        <p:txBody>
+          <a:bodyPr wrap="square" lIns="0" rIns="0" tIns="0" bIns="0">
+            <a:spAutoFit/>
+          </a:bodyPr>
+          <a:lstStyle/>
+          <a:p>
+            <a:pPr algn="ctr">
+              <a:lnSpc>
+                <a:spcPct val="100000"/>
+              </a:lnSpc>
+            </a:pPr>
+            <a:r>
+              <a:rPr sz="1800" b="1" i="0">
+                <a:solidFill>
+                  <a:srgbClr val="083469"/>
+                </a:solidFill>
+                <a:latin typeface="Arial"/>
+              </a:rPr>
+              <a:t>1</a:t>
+            </a:r>
+          </a:p>
+        </p:txBody>
+      </p:sp>
+      <p:sp>
+        <p:nvSpPr>
+          <p:cNvPr id="10" name="Rounded Rectangle 9"/>
+          <p:cNvSpPr/>
+          <p:nvPr/>
+        </p:nvSpPr>
+        <p:spPr>
+          <a:xfrm>
+            <a:off x="868680" y="2926079"/>
             <a:ext cx="2834640" cy="1234440"/>
           </a:xfrm>
           <a:prstGeom prst="roundRect">
@@ -27661,12 +31088,10 @@
               <a:gd name="adj" fmla="val 8000"/>
             </a:avLst>
           </a:prstGeom>
-          <a:solidFill>
-            <a:srgbClr val="FFFFFF"/>
-          </a:solidFill>
+          <a:noFill/>
           <a:ln w="19050">
             <a:solidFill>
-              <a:srgbClr val="008074"/>
+              <a:srgbClr val="D0EAE9"/>
             </a:solidFill>
           </a:ln>
           <a:effectLst/>
@@ -27695,13 +31120,13 @@
       </p:sp>
       <p:sp>
         <p:nvSpPr>
-          <p:cNvPr id="7" name="TextBox 6"/>
+          <p:cNvPr id="11" name="TextBox 10"/>
           <p:cNvSpPr txBox="1"/>
           <p:nvPr/>
         </p:nvSpPr>
         <p:spPr>
           <a:xfrm>
-            <a:off x="868680" y="3017520"/>
+            <a:off x="868680" y="3200400"/>
             <a:ext cx="2834640" cy="411480"/>
           </a:xfrm>
           <a:prstGeom prst="rect">
@@ -27723,7 +31148,7 @@
             <a:r>
               <a:rPr sz="1700" b="1" i="0">
                 <a:solidFill>
-                  <a:srgbClr val="008074"/>
+                  <a:srgbClr val="D0EAE9"/>
                 </a:solidFill>
                 <a:latin typeface="Arial"/>
               </a:rPr>
@@ -27734,13 +31159,13 @@
       </p:sp>
       <p:sp>
         <p:nvSpPr>
-          <p:cNvPr id="8" name="TextBox 7"/>
+          <p:cNvPr id="12" name="TextBox 11"/>
           <p:cNvSpPr txBox="1"/>
           <p:nvPr/>
         </p:nvSpPr>
         <p:spPr>
           <a:xfrm>
-            <a:off x="868680" y="3456432"/>
+            <a:off x="868680" y="3639312"/>
             <a:ext cx="2834640" cy="365760"/>
           </a:xfrm>
           <a:prstGeom prst="rect">
@@ -27762,7 +31187,7 @@
             <a:r>
               <a:rPr sz="1200" b="0" i="0">
                 <a:solidFill>
-                  <a:srgbClr val="595959"/>
+                  <a:srgbClr val="FFFFFF"/>
                 </a:solidFill>
                 <a:latin typeface="Arial"/>
               </a:rPr>
@@ -27773,20 +31198,20 @@
       </p:sp>
       <p:sp>
         <p:nvSpPr>
-          <p:cNvPr id="9" name="Right Arrow 8"/>
+          <p:cNvPr id="13" name="Right Arrow 12"/>
           <p:cNvSpPr/>
           <p:nvPr/>
         </p:nvSpPr>
         <p:spPr>
           <a:xfrm>
-            <a:off x="3931920" y="3200400"/>
+            <a:off x="3931920" y="3383279"/>
             <a:ext cx="411480" cy="347472"/>
           </a:xfrm>
           <a:prstGeom prst="rightArrow">
             <a:avLst/>
           </a:prstGeom>
           <a:solidFill>
-            <a:srgbClr val="008074"/>
+            <a:srgbClr val="00D190"/>
           </a:solidFill>
           <a:ln>
             <a:noFill/>
@@ -27817,13 +31242,96 @@
       </p:sp>
       <p:sp>
         <p:nvSpPr>
-          <p:cNvPr id="10" name="Rounded Rectangle 9"/>
+          <p:cNvPr id="14" name="Oval 13"/>
           <p:cNvSpPr/>
           <p:nvPr/>
         </p:nvSpPr>
         <p:spPr>
           <a:xfrm>
-            <a:off x="4572000" y="2743200"/>
+            <a:off x="5715000" y="2103120"/>
+            <a:ext cx="548640" cy="548640"/>
+          </a:xfrm>
+          <a:prstGeom prst="ellipse">
+            <a:avLst/>
+          </a:prstGeom>
+          <a:solidFill>
+            <a:srgbClr val="00D190"/>
+          </a:solidFill>
+          <a:ln>
+            <a:noFill/>
+          </a:ln>
+          <a:effectLst/>
+        </p:spPr>
+        <p:style>
+          <a:lnRef idx="1">
+            <a:schemeClr val="accent1"/>
+          </a:lnRef>
+          <a:fillRef idx="3">
+            <a:schemeClr val="accent1"/>
+          </a:fillRef>
+          <a:effectRef idx="2">
+            <a:schemeClr val="accent1"/>
+          </a:effectRef>
+          <a:fontRef idx="minor">
+            <a:schemeClr val="lt1"/>
+          </a:fontRef>
+        </p:style>
+        <p:txBody>
+          <a:bodyPr rtlCol="0" anchor="ctr"/>
+          <a:lstStyle/>
+          <a:p>
+            <a:pPr algn="ctr"/>
+          </a:p>
+        </p:txBody>
+      </p:sp>
+      <p:sp>
+        <p:nvSpPr>
+          <p:cNvPr id="15" name="TextBox 14"/>
+          <p:cNvSpPr txBox="1"/>
+          <p:nvPr/>
+        </p:nvSpPr>
+        <p:spPr>
+          <a:xfrm>
+            <a:off x="5715000" y="2212848"/>
+            <a:ext cx="548640" cy="365760"/>
+          </a:xfrm>
+          <a:prstGeom prst="rect">
+            <a:avLst/>
+          </a:prstGeom>
+          <a:noFill/>
+        </p:spPr>
+        <p:txBody>
+          <a:bodyPr wrap="square" lIns="0" rIns="0" tIns="0" bIns="0">
+            <a:spAutoFit/>
+          </a:bodyPr>
+          <a:lstStyle/>
+          <a:p>
+            <a:pPr algn="ctr">
+              <a:lnSpc>
+                <a:spcPct val="100000"/>
+              </a:lnSpc>
+            </a:pPr>
+            <a:r>
+              <a:rPr sz="1800" b="1" i="0">
+                <a:solidFill>
+                  <a:srgbClr val="083469"/>
+                </a:solidFill>
+                <a:latin typeface="Arial"/>
+              </a:rPr>
+              <a:t>2</a:t>
+            </a:r>
+          </a:p>
+        </p:txBody>
+      </p:sp>
+      <p:sp>
+        <p:nvSpPr>
+          <p:cNvPr id="16" name="Rounded Rectangle 15"/>
+          <p:cNvSpPr/>
+          <p:nvPr/>
+        </p:nvSpPr>
+        <p:spPr>
+          <a:xfrm>
+            <a:off x="4572000" y="2926079"/>
             <a:ext cx="2834640" cy="1234440"/>
           </a:xfrm>
           <a:prstGeom prst="roundRect">
@@ -27863,13 +31371,13 @@
       </p:sp>
       <p:sp>
         <p:nvSpPr>
-          <p:cNvPr id="11" name="TextBox 10"/>
+          <p:cNvPr id="17" name="TextBox 16"/>
           <p:cNvSpPr txBox="1"/>
           <p:nvPr/>
         </p:nvSpPr>
         <p:spPr>
           <a:xfrm>
-            <a:off x="4572000" y="3017520"/>
+            <a:off x="4572000" y="3200400"/>
             <a:ext cx="2834640" cy="411480"/>
           </a:xfrm>
           <a:prstGeom prst="rect">
@@ -27902,13 +31410,13 @@
       </p:sp>
       <p:sp>
         <p:nvSpPr>
-          <p:cNvPr id="12" name="TextBox 11"/>
+          <p:cNvPr id="18" name="TextBox 17"/>
           <p:cNvSpPr txBox="1"/>
           <p:nvPr/>
         </p:nvSpPr>
         <p:spPr>
           <a:xfrm>
-            <a:off x="4572000" y="3456432"/>
+            <a:off x="4572000" y="3639312"/>
             <a:ext cx="2834640" cy="365760"/>
           </a:xfrm>
           <a:prstGeom prst="rect">
@@ -27941,20 +31449,20 @@
       </p:sp>
       <p:sp>
         <p:nvSpPr>
-          <p:cNvPr id="13" name="Right Arrow 12"/>
+          <p:cNvPr id="19" name="Right Arrow 18"/>
           <p:cNvSpPr/>
           <p:nvPr/>
         </p:nvSpPr>
         <p:spPr>
           <a:xfrm>
-            <a:off x="7635240" y="3200400"/>
+            <a:off x="7635240" y="3383279"/>
             <a:ext cx="411480" cy="347472"/>
           </a:xfrm>
           <a:prstGeom prst="rightArrow">
             <a:avLst/>
           </a:prstGeom>
           <a:solidFill>
-            <a:srgbClr val="008074"/>
+            <a:srgbClr val="00D190"/>
           </a:solidFill>
           <a:ln>
             <a:noFill/>
@@ -27985,13 +31493,96 @@
       </p:sp>
       <p:sp>
         <p:nvSpPr>
-          <p:cNvPr id="14" name="Rounded Rectangle 13"/>
+          <p:cNvPr id="20" name="Oval 19"/>
           <p:cNvSpPr/>
           <p:nvPr/>
         </p:nvSpPr>
         <p:spPr>
           <a:xfrm>
-            <a:off x="8275319" y="2743200"/>
+            <a:off x="9418319" y="2103120"/>
+            <a:ext cx="548640" cy="548640"/>
+          </a:xfrm>
+          <a:prstGeom prst="ellipse">
+            <a:avLst/>
+          </a:prstGeom>
+          <a:solidFill>
+            <a:srgbClr val="00D190"/>
+          </a:solidFill>
+          <a:ln>
+            <a:noFill/>
+          </a:ln>
+          <a:effectLst/>
+        </p:spPr>
+        <p:style>
+          <a:lnRef idx="1">
+            <a:schemeClr val="accent1"/>
+          </a:lnRef>
+          <a:fillRef idx="3">
+            <a:schemeClr val="accent1"/>
+          </a:fillRef>
+          <a:effectRef idx="2">
+            <a:schemeClr val="accent1"/>
+          </a:effectRef>
+          <a:fontRef idx="minor">
+            <a:schemeClr val="lt1"/>
+          </a:fontRef>
+        </p:style>
+        <p:txBody>
+          <a:bodyPr rtlCol="0" anchor="ctr"/>
+          <a:lstStyle/>
+          <a:p>
+            <a:pPr algn="ctr"/>
+          </a:p>
+        </p:txBody>
+      </p:sp>
+      <p:sp>
+        <p:nvSpPr>
+          <p:cNvPr id="21" name="TextBox 20"/>
+          <p:cNvSpPr txBox="1"/>
+          <p:nvPr/>
+        </p:nvSpPr>
+        <p:spPr>
+          <a:xfrm>
+            <a:off x="9418319" y="2212848"/>
+            <a:ext cx="548640" cy="365760"/>
+          </a:xfrm>
+          <a:prstGeom prst="rect">
+            <a:avLst/>
+          </a:prstGeom>
+          <a:noFill/>
+        </p:spPr>
+        <p:txBody>
+          <a:bodyPr wrap="square" lIns="0" rIns="0" tIns="0" bIns="0">
+            <a:spAutoFit/>
+          </a:bodyPr>
+          <a:lstStyle/>
+          <a:p>
+            <a:pPr algn="ctr">
+              <a:lnSpc>
+                <a:spcPct val="100000"/>
+              </a:lnSpc>
+            </a:pPr>
+            <a:r>
+              <a:rPr sz="1800" b="1" i="0">
+                <a:solidFill>
+                  <a:srgbClr val="083469"/>
+                </a:solidFill>
+                <a:latin typeface="Arial"/>
+              </a:rPr>
+              <a:t>3</a:t>
+            </a:r>
+          </a:p>
+        </p:txBody>
+      </p:sp>
+      <p:sp>
+        <p:nvSpPr>
+          <p:cNvPr id="22" name="Rounded Rectangle 21"/>
+          <p:cNvSpPr/>
+          <p:nvPr/>
+        </p:nvSpPr>
+        <p:spPr>
+          <a:xfrm>
+            <a:off x="8275319" y="2926079"/>
             <a:ext cx="2834640" cy="1234440"/>
           </a:xfrm>
           <a:prstGeom prst="roundRect">
@@ -27999,12 +31590,10 @@
               <a:gd name="adj" fmla="val 8000"/>
             </a:avLst>
           </a:prstGeom>
-          <a:solidFill>
-            <a:srgbClr val="FFFFFF"/>
-          </a:solidFill>
+          <a:noFill/>
           <a:ln w="19050">
             <a:solidFill>
-              <a:srgbClr val="008074"/>
+              <a:srgbClr val="D0EAE9"/>
             </a:solidFill>
           </a:ln>
           <a:effectLst/>
@@ -28033,13 +31622,13 @@
       </p:sp>
       <p:sp>
         <p:nvSpPr>
-          <p:cNvPr id="15" name="TextBox 14"/>
+          <p:cNvPr id="23" name="TextBox 22"/>
           <p:cNvSpPr txBox="1"/>
           <p:nvPr/>
         </p:nvSpPr>
         <p:spPr>
           <a:xfrm>
-            <a:off x="8275319" y="3017520"/>
+            <a:off x="8275319" y="3200400"/>
             <a:ext cx="2834640" cy="411480"/>
           </a:xfrm>
           <a:prstGeom prst="rect">
@@ -28061,7 +31650,7 @@
             <a:r>
               <a:rPr sz="1700" b="1" i="0">
                 <a:solidFill>
-                  <a:srgbClr val="008074"/>
+                  <a:srgbClr val="D0EAE9"/>
                 </a:solidFill>
                 <a:latin typeface="Arial"/>
               </a:rPr>
@@ -28072,13 +31661,13 @@
       </p:sp>
       <p:sp>
         <p:nvSpPr>
-          <p:cNvPr id="16" name="TextBox 15"/>
+          <p:cNvPr id="24" name="TextBox 23"/>
           <p:cNvSpPr txBox="1"/>
           <p:nvPr/>
         </p:nvSpPr>
         <p:spPr>
           <a:xfrm>
-            <a:off x="8275319" y="3456432"/>
+            <a:off x="8275319" y="3639312"/>
             <a:ext cx="2834640" cy="365760"/>
           </a:xfrm>
           <a:prstGeom prst="rect">
@@ -28100,7 +31689,7 @@
             <a:r>
               <a:rPr sz="1200" b="0" i="0">
                 <a:solidFill>
-                  <a:srgbClr val="595959"/>
+                  <a:srgbClr val="FFFFFF"/>
                 </a:solidFill>
                 <a:latin typeface="Arial"/>
               </a:rPr>
@@ -28111,13 +31700,13 @@
       </p:sp>
       <p:sp>
         <p:nvSpPr>
-          <p:cNvPr id="17" name="TextBox 16"/>
+          <p:cNvPr id="25" name="TextBox 24"/>
           <p:cNvSpPr txBox="1"/>
           <p:nvPr/>
         </p:nvSpPr>
         <p:spPr>
           <a:xfrm>
-            <a:off x="822960" y="4709160"/>
+            <a:off x="822960" y="4892040"/>
             <a:ext cx="10607040" cy="411480"/>
           </a:xfrm>
           <a:prstGeom prst="rect">
@@ -28139,7 +31728,7 @@
             <a:r>
               <a:rPr sz="1500" b="0" i="1">
                 <a:solidFill>
-                  <a:srgbClr val="595959"/>
+                  <a:srgbClr val="D0EAE9"/>
                 </a:solidFill>
                 <a:latin typeface="Arial"/>
               </a:rPr>
@@ -28210,13 +31799,101 @@
       </p:sp>
       <p:sp>
         <p:nvSpPr>
-          <p:cNvPr id="6" name="Rounded Rectangle 5"/>
+          <p:cNvPr id="6" name="Rectangle 5"/>
           <p:cNvSpPr/>
           <p:nvPr/>
         </p:nvSpPr>
         <p:spPr>
           <a:xfrm>
-            <a:off x="1234440" y="2103120"/>
+            <a:off x="10744200" y="-1188720"/>
+            <a:ext cx="2286000" cy="2286000"/>
+          </a:xfrm>
+          <a:prstGeom prst="rect">
+            <a:avLst/>
+          </a:prstGeom>
+          <a:noFill/>
+          <a:ln w="31750">
+            <a:solidFill>
+              <a:srgbClr val="E6ECEE"/>
+            </a:solidFill>
+          </a:ln>
+          <a:effectLst/>
+        </p:spPr>
+        <p:style>
+          <a:lnRef idx="1">
+            <a:schemeClr val="accent1"/>
+          </a:lnRef>
+          <a:fillRef idx="3">
+            <a:schemeClr val="accent1"/>
+          </a:fillRef>
+          <a:effectRef idx="2">
+            <a:schemeClr val="accent1"/>
+          </a:effectRef>
+          <a:fontRef idx="minor">
+            <a:schemeClr val="lt1"/>
+          </a:fontRef>
+        </p:style>
+        <p:txBody>
+          <a:bodyPr rtlCol="0" anchor="ctr"/>
+          <a:lstStyle/>
+          <a:p>
+            <a:pPr algn="ctr"/>
+          </a:p>
+        </p:txBody>
+      </p:sp>
+      <p:sp>
+        <p:nvSpPr>
+          <p:cNvPr id="7" name="Rectangle 6"/>
+          <p:cNvSpPr/>
+          <p:nvPr/>
+        </p:nvSpPr>
+        <p:spPr>
+          <a:xfrm>
+            <a:off x="11384280" y="-548640"/>
+            <a:ext cx="2103120" cy="2103120"/>
+          </a:xfrm>
+          <a:prstGeom prst="rect">
+            <a:avLst/>
+          </a:prstGeom>
+          <a:noFill/>
+          <a:ln w="31750">
+            <a:solidFill>
+              <a:srgbClr val="D0EAE9"/>
+            </a:solidFill>
+          </a:ln>
+          <a:effectLst/>
+        </p:spPr>
+        <p:style>
+          <a:lnRef idx="1">
+            <a:schemeClr val="accent1"/>
+          </a:lnRef>
+          <a:fillRef idx="3">
+            <a:schemeClr val="accent1"/>
+          </a:fillRef>
+          <a:effectRef idx="2">
+            <a:schemeClr val="accent1"/>
+          </a:effectRef>
+          <a:fontRef idx="minor">
+            <a:schemeClr val="lt1"/>
+          </a:fontRef>
+        </p:style>
+        <p:txBody>
+          <a:bodyPr rtlCol="0" anchor="ctr"/>
+          <a:lstStyle/>
+          <a:p>
+            <a:pPr algn="ctr"/>
+          </a:p>
+        </p:txBody>
+      </p:sp>
+      <p:sp>
+        <p:nvSpPr>
+          <p:cNvPr id="8" name="Rounded Rectangle 7"/>
+          <p:cNvSpPr/>
+          <p:nvPr/>
+        </p:nvSpPr>
+        <p:spPr>
+          <a:xfrm>
+            <a:off x="1234440" y="2331720"/>
             <a:ext cx="4206240" cy="2834640"/>
           </a:xfrm>
           <a:prstGeom prst="roundRect">
@@ -28256,13 +31933,57 @@
       </p:sp>
       <p:sp>
         <p:nvSpPr>
-          <p:cNvPr id="7" name="TextBox 6"/>
+          <p:cNvPr id="9" name="Rectangle 8"/>
+          <p:cNvSpPr/>
+          <p:nvPr/>
+        </p:nvSpPr>
+        <p:spPr>
+          <a:xfrm>
+            <a:off x="1234440" y="2331720"/>
+            <a:ext cx="4206240" cy="128016"/>
+          </a:xfrm>
+          <a:prstGeom prst="rect">
+            <a:avLst/>
+          </a:prstGeom>
+          <a:solidFill>
+            <a:srgbClr val="008074"/>
+          </a:solidFill>
+          <a:ln>
+            <a:noFill/>
+          </a:ln>
+          <a:effectLst/>
+        </p:spPr>
+        <p:style>
+          <a:lnRef idx="1">
+            <a:schemeClr val="accent1"/>
+          </a:lnRef>
+          <a:fillRef idx="3">
+            <a:schemeClr val="accent1"/>
+          </a:fillRef>
+          <a:effectRef idx="2">
+            <a:schemeClr val="accent1"/>
+          </a:effectRef>
+          <a:fontRef idx="minor">
+            <a:schemeClr val="lt1"/>
+          </a:fontRef>
+        </p:style>
+        <p:txBody>
+          <a:bodyPr rtlCol="0" anchor="ctr"/>
+          <a:lstStyle/>
+          <a:p>
+            <a:pPr algn="ctr"/>
+          </a:p>
+        </p:txBody>
+      </p:sp>
+      <p:sp>
+        <p:nvSpPr>
+          <p:cNvPr id="10" name="TextBox 9"/>
           <p:cNvSpPr txBox="1"/>
           <p:nvPr/>
         </p:nvSpPr>
         <p:spPr>
           <a:xfrm>
-            <a:off x="1554480" y="2377439"/>
+            <a:off x="1554480" y="2624327"/>
             <a:ext cx="3566159" cy="365760"/>
           </a:xfrm>
           <a:prstGeom prst="rect">
@@ -28295,14 +32016,58 @@
       </p:sp>
       <p:sp>
         <p:nvSpPr>
-          <p:cNvPr id="8" name="TextBox 7"/>
+          <p:cNvPr id="11" name="Oval 10"/>
+          <p:cNvSpPr/>
+          <p:nvPr/>
+        </p:nvSpPr>
+        <p:spPr>
+          <a:xfrm>
+            <a:off x="1581912" y="3246120"/>
+            <a:ext cx="91440" cy="91440"/>
+          </a:xfrm>
+          <a:prstGeom prst="ellipse">
+            <a:avLst/>
+          </a:prstGeom>
+          <a:solidFill>
+            <a:srgbClr val="00D190"/>
+          </a:solidFill>
+          <a:ln>
+            <a:noFill/>
+          </a:ln>
+          <a:effectLst/>
+        </p:spPr>
+        <p:style>
+          <a:lnRef idx="1">
+            <a:schemeClr val="accent1"/>
+          </a:lnRef>
+          <a:fillRef idx="3">
+            <a:schemeClr val="accent1"/>
+          </a:fillRef>
+          <a:effectRef idx="2">
+            <a:schemeClr val="accent1"/>
+          </a:effectRef>
+          <a:fontRef idx="minor">
+            <a:schemeClr val="lt1"/>
+          </a:fontRef>
+        </p:style>
+        <p:txBody>
+          <a:bodyPr rtlCol="0" anchor="ctr"/>
+          <a:lstStyle/>
+          <a:p>
+            <a:pPr algn="ctr"/>
+          </a:p>
+        </p:txBody>
+      </p:sp>
+      <p:sp>
+        <p:nvSpPr>
+          <p:cNvPr id="12" name="TextBox 11"/>
           <p:cNvSpPr txBox="1"/>
           <p:nvPr/>
         </p:nvSpPr>
         <p:spPr>
           <a:xfrm>
-            <a:off x="1554480" y="2926079"/>
-            <a:ext cx="3566159" cy="365760"/>
+            <a:off x="1819656" y="3154679"/>
+            <a:ext cx="3291839" cy="365760"/>
           </a:xfrm>
           <a:prstGeom prst="rect">
             <a:avLst/>
@@ -28327,21 +32092,65 @@
                 </a:solidFill>
                 <a:latin typeface="Arial"/>
               </a:rPr>
-              <a:t>•  Consultant toolkit</a:t>
+              <a:t>Consultant toolkit</a:t>
             </a:r>
           </a:p>
         </p:txBody>
       </p:sp>
       <p:sp>
         <p:nvSpPr>
-          <p:cNvPr id="9" name="TextBox 8"/>
+          <p:cNvPr id="13" name="Oval 12"/>
+          <p:cNvSpPr/>
+          <p:nvPr/>
+        </p:nvSpPr>
+        <p:spPr>
+          <a:xfrm>
+            <a:off x="1581912" y="3703320"/>
+            <a:ext cx="91440" cy="91440"/>
+          </a:xfrm>
+          <a:prstGeom prst="ellipse">
+            <a:avLst/>
+          </a:prstGeom>
+          <a:solidFill>
+            <a:srgbClr val="00D190"/>
+          </a:solidFill>
+          <a:ln>
+            <a:noFill/>
+          </a:ln>
+          <a:effectLst/>
+        </p:spPr>
+        <p:style>
+          <a:lnRef idx="1">
+            <a:schemeClr val="accent1"/>
+          </a:lnRef>
+          <a:fillRef idx="3">
+            <a:schemeClr val="accent1"/>
+          </a:fillRef>
+          <a:effectRef idx="2">
+            <a:schemeClr val="accent1"/>
+          </a:effectRef>
+          <a:fontRef idx="minor">
+            <a:schemeClr val="lt1"/>
+          </a:fontRef>
+        </p:style>
+        <p:txBody>
+          <a:bodyPr rtlCol="0" anchor="ctr"/>
+          <a:lstStyle/>
+          <a:p>
+            <a:pPr algn="ctr"/>
+          </a:p>
+        </p:txBody>
+      </p:sp>
+      <p:sp>
+        <p:nvSpPr>
+          <p:cNvPr id="14" name="TextBox 13"/>
           <p:cNvSpPr txBox="1"/>
           <p:nvPr/>
         </p:nvSpPr>
         <p:spPr>
           <a:xfrm>
-            <a:off x="1554480" y="3383279"/>
-            <a:ext cx="3566159" cy="365760"/>
+            <a:off x="1819656" y="3611879"/>
+            <a:ext cx="3291839" cy="365760"/>
           </a:xfrm>
           <a:prstGeom prst="rect">
             <a:avLst/>
@@ -28366,20 +32175,20 @@
                 </a:solidFill>
                 <a:latin typeface="Arial"/>
               </a:rPr>
-              <a:t>•  Ready to use</a:t>
+              <a:t>Ready to use</a:t>
             </a:r>
           </a:p>
         </p:txBody>
       </p:sp>
       <p:sp>
         <p:nvSpPr>
-          <p:cNvPr id="10" name="TextBox 9"/>
+          <p:cNvPr id="15" name="TextBox 14"/>
           <p:cNvSpPr txBox="1"/>
           <p:nvPr/>
         </p:nvSpPr>
         <p:spPr>
           <a:xfrm>
-            <a:off x="1554480" y="4389120"/>
+            <a:off x="1554480" y="4617720"/>
             <a:ext cx="3566159" cy="365760"/>
           </a:xfrm>
           <a:prstGeom prst="rect">
@@ -28412,13 +32221,13 @@
       </p:sp>
       <p:sp>
         <p:nvSpPr>
-          <p:cNvPr id="11" name="Right Arrow 10"/>
+          <p:cNvPr id="16" name="Right Arrow 15"/>
           <p:cNvSpPr/>
           <p:nvPr/>
         </p:nvSpPr>
         <p:spPr>
           <a:xfrm>
-            <a:off x="5715000" y="3328415"/>
+            <a:off x="5715000" y="3557015"/>
             <a:ext cx="502920" cy="384048"/>
           </a:xfrm>
           <a:prstGeom prst="rightArrow">
@@ -28456,13 +32265,13 @@
       </p:sp>
       <p:sp>
         <p:nvSpPr>
-          <p:cNvPr id="12" name="Rounded Rectangle 11"/>
+          <p:cNvPr id="17" name="Rounded Rectangle 16"/>
           <p:cNvSpPr/>
           <p:nvPr/>
         </p:nvSpPr>
         <p:spPr>
           <a:xfrm>
-            <a:off x="6537960" y="2103120"/>
+            <a:off x="6537960" y="2011679"/>
             <a:ext cx="4206240" cy="2834640"/>
           </a:xfrm>
           <a:prstGeom prst="roundRect">
@@ -28504,13 +32313,13 @@
       </p:sp>
       <p:sp>
         <p:nvSpPr>
-          <p:cNvPr id="13" name="TextBox 12"/>
+          <p:cNvPr id="18" name="TextBox 17"/>
           <p:cNvSpPr txBox="1"/>
           <p:nvPr/>
         </p:nvSpPr>
         <p:spPr>
           <a:xfrm>
-            <a:off x="6858000" y="2377439"/>
+            <a:off x="6858000" y="2304287"/>
             <a:ext cx="3566159" cy="365760"/>
           </a:xfrm>
           <a:prstGeom prst="rect">
@@ -28543,14 +32352,58 @@
       </p:sp>
       <p:sp>
         <p:nvSpPr>
-          <p:cNvPr id="14" name="TextBox 13"/>
+          <p:cNvPr id="19" name="Oval 18"/>
+          <p:cNvSpPr/>
+          <p:nvPr/>
+        </p:nvSpPr>
+        <p:spPr>
+          <a:xfrm>
+            <a:off x="6885432" y="2926079"/>
+            <a:ext cx="91440" cy="91440"/>
+          </a:xfrm>
+          <a:prstGeom prst="ellipse">
+            <a:avLst/>
+          </a:prstGeom>
+          <a:solidFill>
+            <a:srgbClr val="008074"/>
+          </a:solidFill>
+          <a:ln>
+            <a:noFill/>
+          </a:ln>
+          <a:effectLst/>
+        </p:spPr>
+        <p:style>
+          <a:lnRef idx="1">
+            <a:schemeClr val="accent1"/>
+          </a:lnRef>
+          <a:fillRef idx="3">
+            <a:schemeClr val="accent1"/>
+          </a:fillRef>
+          <a:effectRef idx="2">
+            <a:schemeClr val="accent1"/>
+          </a:effectRef>
+          <a:fontRef idx="minor">
+            <a:schemeClr val="lt1"/>
+          </a:fontRef>
+        </p:style>
+        <p:txBody>
+          <a:bodyPr rtlCol="0" anchor="ctr"/>
+          <a:lstStyle/>
+          <a:p>
+            <a:pPr algn="ctr"/>
+          </a:p>
+        </p:txBody>
+      </p:sp>
+      <p:sp>
+        <p:nvSpPr>
+          <p:cNvPr id="20" name="TextBox 19"/>
           <p:cNvSpPr txBox="1"/>
           <p:nvPr/>
         </p:nvSpPr>
         <p:spPr>
           <a:xfrm>
-            <a:off x="6858000" y="2926079"/>
-            <a:ext cx="3566159" cy="365760"/>
+            <a:off x="7123176" y="2834639"/>
+            <a:ext cx="3291839" cy="365760"/>
           </a:xfrm>
           <a:prstGeom prst="rect">
             <a:avLst/>
@@ -28575,21 +32428,65 @@
                 </a:solidFill>
                 <a:latin typeface="Arial"/>
               </a:rPr>
-              <a:t>•  Hosted on CI Pro</a:t>
+              <a:t>Hosted on CI Pro</a:t>
             </a:r>
           </a:p>
         </p:txBody>
       </p:sp>
       <p:sp>
         <p:nvSpPr>
-          <p:cNvPr id="15" name="TextBox 14"/>
+          <p:cNvPr id="21" name="Oval 20"/>
+          <p:cNvSpPr/>
+          <p:nvPr/>
+        </p:nvSpPr>
+        <p:spPr>
+          <a:xfrm>
+            <a:off x="6885432" y="3383279"/>
+            <a:ext cx="91440" cy="91440"/>
+          </a:xfrm>
+          <a:prstGeom prst="ellipse">
+            <a:avLst/>
+          </a:prstGeom>
+          <a:solidFill>
+            <a:srgbClr val="008074"/>
+          </a:solidFill>
+          <a:ln>
+            <a:noFill/>
+          </a:ln>
+          <a:effectLst/>
+        </p:spPr>
+        <p:style>
+          <a:lnRef idx="1">
+            <a:schemeClr val="accent1"/>
+          </a:lnRef>
+          <a:fillRef idx="3">
+            <a:schemeClr val="accent1"/>
+          </a:fillRef>
+          <a:effectRef idx="2">
+            <a:schemeClr val="accent1"/>
+          </a:effectRef>
+          <a:fontRef idx="minor">
+            <a:schemeClr val="lt1"/>
+          </a:fontRef>
+        </p:style>
+        <p:txBody>
+          <a:bodyPr rtlCol="0" anchor="ctr"/>
+          <a:lstStyle/>
+          <a:p>
+            <a:pPr algn="ctr"/>
+          </a:p>
+        </p:txBody>
+      </p:sp>
+      <p:sp>
+        <p:nvSpPr>
+          <p:cNvPr id="22" name="TextBox 21"/>
           <p:cNvSpPr txBox="1"/>
           <p:nvPr/>
         </p:nvSpPr>
         <p:spPr>
           <a:xfrm>
-            <a:off x="6858000" y="3383279"/>
-            <a:ext cx="3566159" cy="365760"/>
+            <a:off x="7123176" y="3291839"/>
+            <a:ext cx="3291839" cy="365760"/>
           </a:xfrm>
           <a:prstGeom prst="rect">
             <a:avLst/>
@@ -28614,21 +32511,65 @@
                 </a:solidFill>
                 <a:latin typeface="Arial"/>
               </a:rPr>
-              <a:t>•  Advisors sign up</a:t>
+              <a:t>Advisors sign up</a:t>
             </a:r>
           </a:p>
         </p:txBody>
       </p:sp>
       <p:sp>
         <p:nvSpPr>
-          <p:cNvPr id="16" name="TextBox 15"/>
+          <p:cNvPr id="23" name="Oval 22"/>
+          <p:cNvSpPr/>
+          <p:nvPr/>
+        </p:nvSpPr>
+        <p:spPr>
+          <a:xfrm>
+            <a:off x="6885432" y="3840479"/>
+            <a:ext cx="91440" cy="91440"/>
+          </a:xfrm>
+          <a:prstGeom prst="ellipse">
+            <a:avLst/>
+          </a:prstGeom>
+          <a:solidFill>
+            <a:srgbClr val="008074"/>
+          </a:solidFill>
+          <a:ln>
+            <a:noFill/>
+          </a:ln>
+          <a:effectLst/>
+        </p:spPr>
+        <p:style>
+          <a:lnRef idx="1">
+            <a:schemeClr val="accent1"/>
+          </a:lnRef>
+          <a:fillRef idx="3">
+            <a:schemeClr val="accent1"/>
+          </a:fillRef>
+          <a:effectRef idx="2">
+            <a:schemeClr val="accent1"/>
+          </a:effectRef>
+          <a:fontRef idx="minor">
+            <a:schemeClr val="lt1"/>
+          </a:fontRef>
+        </p:style>
+        <p:txBody>
+          <a:bodyPr rtlCol="0" anchor="ctr"/>
+          <a:lstStyle/>
+          <a:p>
+            <a:pPr algn="ctr"/>
+          </a:p>
+        </p:txBody>
+      </p:sp>
+      <p:sp>
+        <p:nvSpPr>
+          <p:cNvPr id="24" name="TextBox 23"/>
           <p:cNvSpPr txBox="1"/>
           <p:nvPr/>
         </p:nvSpPr>
         <p:spPr>
           <a:xfrm>
-            <a:off x="6858000" y="3840479"/>
-            <a:ext cx="3566159" cy="365760"/>
+            <a:off x="7123176" y="3749039"/>
+            <a:ext cx="3291839" cy="365760"/>
           </a:xfrm>
           <a:prstGeom prst="rect">
             <a:avLst/>
@@ -28653,20 +32594,20 @@
                 </a:solidFill>
                 <a:latin typeface="Arial"/>
               </a:rPr>
-              <a:t>•  Materials in one place</a:t>
+              <a:t>Materials in one place</a:t>
             </a:r>
           </a:p>
         </p:txBody>
       </p:sp>
       <p:sp>
         <p:nvSpPr>
-          <p:cNvPr id="17" name="TextBox 16"/>
+          <p:cNvPr id="25" name="TextBox 24"/>
           <p:cNvSpPr txBox="1"/>
           <p:nvPr/>
         </p:nvSpPr>
         <p:spPr>
           <a:xfrm>
-            <a:off x="6858000" y="4389120"/>
+            <a:off x="6858000" y="4297680"/>
             <a:ext cx="3566159" cy="365760"/>
           </a:xfrm>
           <a:prstGeom prst="rect">
@@ -28759,6 +32700,138 @@
               </a:rPr>
               <a:t>Questions?</a:t>
             </a:r>
+          </a:p>
+        </p:txBody>
+      </p:sp>
+      <p:sp>
+        <p:nvSpPr>
+          <p:cNvPr id="4" name="Rectangle 3"/>
+          <p:cNvSpPr/>
+          <p:nvPr/>
+        </p:nvSpPr>
+        <p:spPr>
+          <a:xfrm>
+            <a:off x="8138160" y="1005840"/>
+            <a:ext cx="3749039" cy="3749039"/>
+          </a:xfrm>
+          <a:prstGeom prst="rect">
+            <a:avLst/>
+          </a:prstGeom>
+          <a:noFill/>
+          <a:ln w="38100">
+            <a:solidFill>
+              <a:srgbClr val="FFFFFF"/>
+            </a:solidFill>
+          </a:ln>
+          <a:effectLst/>
+        </p:spPr>
+        <p:style>
+          <a:lnRef idx="1">
+            <a:schemeClr val="accent1"/>
+          </a:lnRef>
+          <a:fillRef idx="3">
+            <a:schemeClr val="accent1"/>
+          </a:fillRef>
+          <a:effectRef idx="2">
+            <a:schemeClr val="accent1"/>
+          </a:effectRef>
+          <a:fontRef idx="minor">
+            <a:schemeClr val="lt1"/>
+          </a:fontRef>
+        </p:style>
+        <p:txBody>
+          <a:bodyPr rtlCol="0" anchor="ctr"/>
+          <a:lstStyle/>
+          <a:p>
+            <a:pPr algn="ctr"/>
+          </a:p>
+        </p:txBody>
+      </p:sp>
+      <p:sp>
+        <p:nvSpPr>
+          <p:cNvPr id="5" name="Rectangle 4"/>
+          <p:cNvSpPr/>
+          <p:nvPr/>
+        </p:nvSpPr>
+        <p:spPr>
+          <a:xfrm>
+            <a:off x="9006840" y="1874519"/>
+            <a:ext cx="2651760" cy="2651760"/>
+          </a:xfrm>
+          <a:prstGeom prst="rect">
+            <a:avLst/>
+          </a:prstGeom>
+          <a:noFill/>
+          <a:ln w="25400">
+            <a:solidFill>
+              <a:srgbClr val="D0EAE9"/>
+            </a:solidFill>
+          </a:ln>
+          <a:effectLst/>
+        </p:spPr>
+        <p:style>
+          <a:lnRef idx="1">
+            <a:schemeClr val="accent1"/>
+          </a:lnRef>
+          <a:fillRef idx="3">
+            <a:schemeClr val="accent1"/>
+          </a:fillRef>
+          <a:effectRef idx="2">
+            <a:schemeClr val="accent1"/>
+          </a:effectRef>
+          <a:fontRef idx="minor">
+            <a:schemeClr val="lt1"/>
+          </a:fontRef>
+        </p:style>
+        <p:txBody>
+          <a:bodyPr rtlCol="0" anchor="ctr"/>
+          <a:lstStyle/>
+          <a:p>
+            <a:pPr algn="ctr"/>
+          </a:p>
+        </p:txBody>
+      </p:sp>
+      <p:sp>
+        <p:nvSpPr>
+          <p:cNvPr id="6" name="Rectangle 5"/>
+          <p:cNvSpPr/>
+          <p:nvPr/>
+        </p:nvSpPr>
+        <p:spPr>
+          <a:xfrm>
+            <a:off x="9738360" y="2606040"/>
+            <a:ext cx="1188720" cy="1188720"/>
+          </a:xfrm>
+          <a:prstGeom prst="rect">
+            <a:avLst/>
+          </a:prstGeom>
+          <a:solidFill>
+            <a:srgbClr val="008074"/>
+          </a:solidFill>
+          <a:ln>
+            <a:noFill/>
+          </a:ln>
+          <a:effectLst/>
+        </p:spPr>
+        <p:style>
+          <a:lnRef idx="1">
+            <a:schemeClr val="accent1"/>
+          </a:lnRef>
+          <a:fillRef idx="3">
+            <a:schemeClr val="accent1"/>
+          </a:fillRef>
+          <a:effectRef idx="2">
+            <a:schemeClr val="accent1"/>
+          </a:effectRef>
+          <a:fontRef idx="minor">
+            <a:schemeClr val="lt1"/>
+          </a:fontRef>
+        </p:style>
+        <p:txBody>
+          <a:bodyPr rtlCol="0" anchor="ctr"/>
+          <a:lstStyle/>
+          <a:p>
+            <a:pPr algn="ctr"/>
           </a:p>
         </p:txBody>
       </p:sp>
